--- a/docs/pptx/auc3/ritu-auc3-scatter-epi.pptx
+++ b/docs/pptx/auc3/ritu-auc3-scatter-epi.pptx
@@ -3411,7 +3411,7 @@
           </p:nvSpPr>
           <p:spPr>
             <a:xfrm>
-              <a:off x="3729101" y="4491920"/>
+              <a:off x="3729103" y="4491921"/>
               <a:ext cx="49651" cy="49651"/>
             </a:xfrm>
             <a:prstGeom prst="ellipse">
@@ -4321,7 +4321,7 @@
           </p:nvSpPr>
           <p:spPr>
             <a:xfrm>
-              <a:off x="2472081" y="3951060"/>
+              <a:off x="5213768" y="4573368"/>
               <a:ext cx="49651" cy="49651"/>
             </a:xfrm>
             <a:prstGeom prst="ellipse">
@@ -4356,7 +4356,7 @@
           </p:nvSpPr>
           <p:spPr>
             <a:xfrm>
-              <a:off x="5213768" y="4573368"/>
+              <a:off x="3685750" y="4840137"/>
               <a:ext cx="49651" cy="49651"/>
             </a:xfrm>
             <a:prstGeom prst="ellipse">
@@ -4391,7 +4391,7 @@
           </p:nvSpPr>
           <p:spPr>
             <a:xfrm>
-              <a:off x="3685750" y="4840137"/>
+              <a:off x="3112606" y="3989203"/>
               <a:ext cx="49651" cy="49651"/>
             </a:xfrm>
             <a:prstGeom prst="ellipse">
@@ -4426,7 +4426,7 @@
           </p:nvSpPr>
           <p:spPr>
             <a:xfrm>
-              <a:off x="3112606" y="3989203"/>
+              <a:off x="6040867" y="4834462"/>
               <a:ext cx="49651" cy="49651"/>
             </a:xfrm>
             <a:prstGeom prst="ellipse">
@@ -4461,7 +4461,7 @@
           </p:nvSpPr>
           <p:spPr>
             <a:xfrm>
-              <a:off x="6040867" y="4834462"/>
+              <a:off x="5003408" y="4261499"/>
               <a:ext cx="49651" cy="49651"/>
             </a:xfrm>
             <a:prstGeom prst="ellipse">
@@ -4496,7 +4496,7 @@
           </p:nvSpPr>
           <p:spPr>
             <a:xfrm>
-              <a:off x="5003408" y="4261499"/>
+              <a:off x="2512385" y="5082764"/>
               <a:ext cx="49651" cy="49651"/>
             </a:xfrm>
             <a:prstGeom prst="ellipse">
@@ -4531,7 +4531,7 @@
           </p:nvSpPr>
           <p:spPr>
             <a:xfrm>
-              <a:off x="2512385" y="5082764"/>
+              <a:off x="5210086" y="4491299"/>
               <a:ext cx="49651" cy="49651"/>
             </a:xfrm>
             <a:prstGeom prst="ellipse">
@@ -4566,7 +4566,7 @@
           </p:nvSpPr>
           <p:spPr>
             <a:xfrm>
-              <a:off x="5210086" y="4491299"/>
+              <a:off x="4101425" y="4862931"/>
               <a:ext cx="49651" cy="49651"/>
             </a:xfrm>
             <a:prstGeom prst="ellipse">
@@ -4601,7 +4601,7 @@
           </p:nvSpPr>
           <p:spPr>
             <a:xfrm>
-              <a:off x="4101425" y="4862931"/>
+              <a:off x="3811273" y="3456872"/>
               <a:ext cx="49651" cy="49651"/>
             </a:xfrm>
             <a:prstGeom prst="ellipse">
@@ -4636,7 +4636,7 @@
           </p:nvSpPr>
           <p:spPr>
             <a:xfrm>
-              <a:off x="3811273" y="3456872"/>
+              <a:off x="4177331" y="4775923"/>
               <a:ext cx="49651" cy="49651"/>
             </a:xfrm>
             <a:prstGeom prst="ellipse">
@@ -4671,7 +4671,7 @@
           </p:nvSpPr>
           <p:spPr>
             <a:xfrm>
-              <a:off x="4177331" y="4775923"/>
+              <a:off x="4944335" y="4932441"/>
               <a:ext cx="49651" cy="49651"/>
             </a:xfrm>
             <a:prstGeom prst="ellipse">
@@ -4706,7 +4706,7 @@
           </p:nvSpPr>
           <p:spPr>
             <a:xfrm>
-              <a:off x="4944335" y="4932441"/>
+              <a:off x="5734771" y="4149900"/>
               <a:ext cx="49651" cy="49651"/>
             </a:xfrm>
             <a:prstGeom prst="ellipse">
@@ -4741,7 +4741,7 @@
           </p:nvSpPr>
           <p:spPr>
             <a:xfrm>
-              <a:off x="5734771" y="4149900"/>
+              <a:off x="7386089" y="4445833"/>
               <a:ext cx="49651" cy="49651"/>
             </a:xfrm>
             <a:prstGeom prst="ellipse">
@@ -4776,7 +4776,7 @@
           </p:nvSpPr>
           <p:spPr>
             <a:xfrm>
-              <a:off x="7386089" y="4445833"/>
+              <a:off x="3686488" y="4931623"/>
               <a:ext cx="49651" cy="49651"/>
             </a:xfrm>
             <a:prstGeom prst="ellipse">
@@ -4811,7 +4811,7 @@
           </p:nvSpPr>
           <p:spPr>
             <a:xfrm>
-              <a:off x="3686488" y="4931623"/>
+              <a:off x="4726739" y="4832592"/>
               <a:ext cx="49651" cy="49651"/>
             </a:xfrm>
             <a:prstGeom prst="ellipse">
@@ -4846,7 +4846,7 @@
           </p:nvSpPr>
           <p:spPr>
             <a:xfrm>
-              <a:off x="4726739" y="4832592"/>
+              <a:off x="3776174" y="4484041"/>
               <a:ext cx="49651" cy="49651"/>
             </a:xfrm>
             <a:prstGeom prst="ellipse">
@@ -4881,7 +4881,7 @@
           </p:nvSpPr>
           <p:spPr>
             <a:xfrm>
-              <a:off x="3776174" y="4484041"/>
+              <a:off x="4405111" y="5251806"/>
               <a:ext cx="49651" cy="49651"/>
             </a:xfrm>
             <a:prstGeom prst="ellipse">
@@ -4916,7 +4916,7 @@
           </p:nvSpPr>
           <p:spPr>
             <a:xfrm>
-              <a:off x="4405111" y="5251806"/>
+              <a:off x="5761250" y="4349796"/>
               <a:ext cx="49651" cy="49651"/>
             </a:xfrm>
             <a:prstGeom prst="ellipse">
@@ -4951,7 +4951,7 @@
           </p:nvSpPr>
           <p:spPr>
             <a:xfrm>
-              <a:off x="5761250" y="4349796"/>
+              <a:off x="4576021" y="5524381"/>
               <a:ext cx="49651" cy="49651"/>
             </a:xfrm>
             <a:prstGeom prst="ellipse">
@@ -4986,7 +4986,7 @@
           </p:nvSpPr>
           <p:spPr>
             <a:xfrm>
-              <a:off x="4576021" y="5524381"/>
+              <a:off x="3827414" y="4058540"/>
               <a:ext cx="49651" cy="49651"/>
             </a:xfrm>
             <a:prstGeom prst="ellipse">
@@ -5021,7 +5021,7 @@
           </p:nvSpPr>
           <p:spPr>
             <a:xfrm>
-              <a:off x="3827414" y="4058540"/>
+              <a:off x="3418843" y="3981333"/>
               <a:ext cx="49651" cy="49651"/>
             </a:xfrm>
             <a:prstGeom prst="ellipse">
@@ -5056,7 +5056,7 @@
           </p:nvSpPr>
           <p:spPr>
             <a:xfrm>
-              <a:off x="3418843" y="3981333"/>
+              <a:off x="5857854" y="4700185"/>
               <a:ext cx="49651" cy="49651"/>
             </a:xfrm>
             <a:prstGeom prst="ellipse">
@@ -5091,7 +5091,7 @@
           </p:nvSpPr>
           <p:spPr>
             <a:xfrm>
-              <a:off x="5857854" y="4700185"/>
+              <a:off x="5076793" y="5216709"/>
               <a:ext cx="49651" cy="49651"/>
             </a:xfrm>
             <a:prstGeom prst="ellipse">
@@ -5126,7 +5126,7 @@
           </p:nvSpPr>
           <p:spPr>
             <a:xfrm>
-              <a:off x="5076793" y="5216709"/>
+              <a:off x="1840172" y="4299826"/>
               <a:ext cx="49651" cy="49651"/>
             </a:xfrm>
             <a:prstGeom prst="ellipse">
@@ -5161,7 +5161,7 @@
           </p:nvSpPr>
           <p:spPr>
             <a:xfrm>
-              <a:off x="1840172" y="4299826"/>
+              <a:off x="4564012" y="5186370"/>
               <a:ext cx="49651" cy="49651"/>
             </a:xfrm>
             <a:prstGeom prst="ellipse">
@@ -5196,7 +5196,7 @@
           </p:nvSpPr>
           <p:spPr>
             <a:xfrm>
-              <a:off x="4564012" y="5186370"/>
+              <a:off x="6388124" y="4369012"/>
               <a:ext cx="49651" cy="49651"/>
             </a:xfrm>
             <a:prstGeom prst="ellipse">
@@ -5231,7 +5231,7 @@
           </p:nvSpPr>
           <p:spPr>
             <a:xfrm>
-              <a:off x="6388124" y="4369012"/>
+              <a:off x="5115725" y="3950134"/>
               <a:ext cx="49651" cy="49651"/>
             </a:xfrm>
             <a:prstGeom prst="ellipse">
@@ -5266,7 +5266,7 @@
           </p:nvSpPr>
           <p:spPr>
             <a:xfrm>
-              <a:off x="5115725" y="3950134"/>
+              <a:off x="5098719" y="4171259"/>
               <a:ext cx="49651" cy="49651"/>
             </a:xfrm>
             <a:prstGeom prst="ellipse">
@@ -5301,7 +5301,7 @@
           </p:nvSpPr>
           <p:spPr>
             <a:xfrm>
-              <a:off x="5098719" y="4171259"/>
+              <a:off x="4576524" y="4495810"/>
               <a:ext cx="49651" cy="49651"/>
             </a:xfrm>
             <a:prstGeom prst="ellipse">
@@ -5336,7 +5336,7 @@
           </p:nvSpPr>
           <p:spPr>
             <a:xfrm>
-              <a:off x="4576524" y="4495810"/>
+              <a:off x="3500090" y="4642912"/>
               <a:ext cx="49651" cy="49651"/>
             </a:xfrm>
             <a:prstGeom prst="ellipse">
@@ -5371,7 +5371,7 @@
           </p:nvSpPr>
           <p:spPr>
             <a:xfrm>
-              <a:off x="3500090" y="4642912"/>
+              <a:off x="4700119" y="3687010"/>
               <a:ext cx="49651" cy="49651"/>
             </a:xfrm>
             <a:prstGeom prst="ellipse">
@@ -5406,7 +5406,7 @@
           </p:nvSpPr>
           <p:spPr>
             <a:xfrm>
-              <a:off x="4700119" y="3687010"/>
+              <a:off x="3722816" y="4403215"/>
               <a:ext cx="49651" cy="49651"/>
             </a:xfrm>
             <a:prstGeom prst="ellipse">
@@ -5441,7 +5441,7 @@
           </p:nvSpPr>
           <p:spPr>
             <a:xfrm>
-              <a:off x="3722816" y="4403215"/>
+              <a:off x="4164271" y="5246686"/>
               <a:ext cx="49651" cy="49651"/>
             </a:xfrm>
             <a:prstGeom prst="ellipse">
@@ -5476,7 +5476,7 @@
           </p:nvSpPr>
           <p:spPr>
             <a:xfrm>
-              <a:off x="4164271" y="5246686"/>
+              <a:off x="5348901" y="4454483"/>
               <a:ext cx="49651" cy="49651"/>
             </a:xfrm>
             <a:prstGeom prst="ellipse">
@@ -5511,7 +5511,7 @@
           </p:nvSpPr>
           <p:spPr>
             <a:xfrm>
-              <a:off x="5348901" y="4454483"/>
+              <a:off x="5363644" y="5352216"/>
               <a:ext cx="49651" cy="49651"/>
             </a:xfrm>
             <a:prstGeom prst="ellipse">
@@ -5546,7 +5546,7 @@
           </p:nvSpPr>
           <p:spPr>
             <a:xfrm>
-              <a:off x="5363644" y="5352216"/>
+              <a:off x="4681261" y="4947064"/>
               <a:ext cx="49651" cy="49651"/>
             </a:xfrm>
             <a:prstGeom prst="ellipse">
@@ -5581,7 +5581,7 @@
           </p:nvSpPr>
           <p:spPr>
             <a:xfrm>
-              <a:off x="4681261" y="4947064"/>
+              <a:off x="3443902" y="4537735"/>
               <a:ext cx="49651" cy="49651"/>
             </a:xfrm>
             <a:prstGeom prst="ellipse">
@@ -5616,7 +5616,7 @@
           </p:nvSpPr>
           <p:spPr>
             <a:xfrm>
-              <a:off x="3443902" y="4537735"/>
+              <a:off x="5533401" y="5144097"/>
               <a:ext cx="49651" cy="49651"/>
             </a:xfrm>
             <a:prstGeom prst="ellipse">
@@ -5651,7 +5651,7 @@
           </p:nvSpPr>
           <p:spPr>
             <a:xfrm>
-              <a:off x="5533401" y="5144097"/>
+              <a:off x="3988719" y="4534072"/>
               <a:ext cx="49651" cy="49651"/>
             </a:xfrm>
             <a:prstGeom prst="ellipse">
@@ -5686,7 +5686,7 @@
           </p:nvSpPr>
           <p:spPr>
             <a:xfrm>
-              <a:off x="3988719" y="4534072"/>
+              <a:off x="4379652" y="3884761"/>
               <a:ext cx="49651" cy="49651"/>
             </a:xfrm>
             <a:prstGeom prst="ellipse">
@@ -5721,7 +5721,7 @@
           </p:nvSpPr>
           <p:spPr>
             <a:xfrm>
-              <a:off x="4379652" y="3884761"/>
+              <a:off x="1506444" y="3857991"/>
               <a:ext cx="49651" cy="49651"/>
             </a:xfrm>
             <a:prstGeom prst="ellipse">
@@ -5756,7 +5756,7 @@
           </p:nvSpPr>
           <p:spPr>
             <a:xfrm>
-              <a:off x="1506444" y="3857991"/>
+              <a:off x="4941066" y="5401751"/>
               <a:ext cx="49651" cy="49651"/>
             </a:xfrm>
             <a:prstGeom prst="ellipse">
@@ -5791,7 +5791,7 @@
           </p:nvSpPr>
           <p:spPr>
             <a:xfrm>
-              <a:off x="4941066" y="5401751"/>
+              <a:off x="4484187" y="5002640"/>
               <a:ext cx="49651" cy="49651"/>
             </a:xfrm>
             <a:prstGeom prst="ellipse">
@@ -5826,7 +5826,7 @@
           </p:nvSpPr>
           <p:spPr>
             <a:xfrm>
-              <a:off x="4484187" y="5002640"/>
+              <a:off x="4278964" y="5123265"/>
               <a:ext cx="49651" cy="49651"/>
             </a:xfrm>
             <a:prstGeom prst="ellipse">
@@ -5861,7 +5861,7 @@
           </p:nvSpPr>
           <p:spPr>
             <a:xfrm>
-              <a:off x="4278964" y="5123265"/>
+              <a:off x="5173837" y="4187576"/>
               <a:ext cx="49651" cy="49651"/>
             </a:xfrm>
             <a:prstGeom prst="ellipse">
@@ -5896,7 +5896,7 @@
           </p:nvSpPr>
           <p:spPr>
             <a:xfrm>
-              <a:off x="5173837" y="4187576"/>
+              <a:off x="3976231" y="4166656"/>
               <a:ext cx="49651" cy="49651"/>
             </a:xfrm>
             <a:prstGeom prst="ellipse">
@@ -5931,7 +5931,7 @@
           </p:nvSpPr>
           <p:spPr>
             <a:xfrm>
-              <a:off x="3976231" y="4166656"/>
+              <a:off x="4252278" y="5107206"/>
               <a:ext cx="49651" cy="49651"/>
             </a:xfrm>
             <a:prstGeom prst="ellipse">
@@ -5966,7 +5966,7 @@
           </p:nvSpPr>
           <p:spPr>
             <a:xfrm>
-              <a:off x="4252278" y="5107206"/>
+              <a:off x="5182527" y="4218465"/>
               <a:ext cx="49651" cy="49651"/>
             </a:xfrm>
             <a:prstGeom prst="ellipse">
@@ -6001,7 +6001,7 @@
           </p:nvSpPr>
           <p:spPr>
             <a:xfrm>
-              <a:off x="5182527" y="4218465"/>
+              <a:off x="4716607" y="4303724"/>
               <a:ext cx="49651" cy="49651"/>
             </a:xfrm>
             <a:prstGeom prst="ellipse">
@@ -6036,7 +6036,7 @@
           </p:nvSpPr>
           <p:spPr>
             <a:xfrm>
-              <a:off x="4716607" y="4303724"/>
+              <a:off x="3149368" y="5355399"/>
               <a:ext cx="49651" cy="49651"/>
             </a:xfrm>
             <a:prstGeom prst="ellipse">
@@ -6071,7 +6071,7 @@
           </p:nvSpPr>
           <p:spPr>
             <a:xfrm>
-              <a:off x="3149368" y="5355399"/>
+              <a:off x="4883698" y="5409570"/>
               <a:ext cx="49651" cy="49651"/>
             </a:xfrm>
             <a:prstGeom prst="ellipse">
@@ -6106,7 +6106,7 @@
           </p:nvSpPr>
           <p:spPr>
             <a:xfrm>
-              <a:off x="4883698" y="5409570"/>
+              <a:off x="6323627" y="5288071"/>
               <a:ext cx="49651" cy="49651"/>
             </a:xfrm>
             <a:prstGeom prst="ellipse">
@@ -6141,7 +6141,7 @@
           </p:nvSpPr>
           <p:spPr>
             <a:xfrm>
-              <a:off x="6323627" y="5288071"/>
+              <a:off x="6761034" y="4780833"/>
               <a:ext cx="49651" cy="49651"/>
             </a:xfrm>
             <a:prstGeom prst="ellipse">
@@ -6176,7 +6176,7 @@
           </p:nvSpPr>
           <p:spPr>
             <a:xfrm>
-              <a:off x="6761034" y="4780833"/>
+              <a:off x="7412194" y="4445833"/>
               <a:ext cx="49651" cy="49651"/>
             </a:xfrm>
             <a:prstGeom prst="ellipse">
@@ -6211,7 +6211,7 @@
           </p:nvSpPr>
           <p:spPr>
             <a:xfrm>
-              <a:off x="7412194" y="4445833"/>
+              <a:off x="5830653" y="4890110"/>
               <a:ext cx="49651" cy="49651"/>
             </a:xfrm>
             <a:prstGeom prst="ellipse">
@@ -6246,7 +6246,7 @@
           </p:nvSpPr>
           <p:spPr>
             <a:xfrm>
-              <a:off x="5830653" y="4890110"/>
+              <a:off x="3193491" y="2045672"/>
               <a:ext cx="49651" cy="49651"/>
             </a:xfrm>
             <a:prstGeom prst="ellipse">
@@ -6281,7 +6281,7 @@
           </p:nvSpPr>
           <p:spPr>
             <a:xfrm>
-              <a:off x="3193491" y="2045672"/>
+              <a:off x="4726157" y="4881211"/>
               <a:ext cx="49651" cy="49651"/>
             </a:xfrm>
             <a:prstGeom prst="ellipse">
@@ -6316,7 +6316,7 @@
           </p:nvSpPr>
           <p:spPr>
             <a:xfrm>
-              <a:off x="4726157" y="4881211"/>
+              <a:off x="5655592" y="4192905"/>
               <a:ext cx="49651" cy="49651"/>
             </a:xfrm>
             <a:prstGeom prst="ellipse">
@@ -6351,7 +6351,7 @@
           </p:nvSpPr>
           <p:spPr>
             <a:xfrm>
-              <a:off x="5655592" y="4192905"/>
+              <a:off x="3436397" y="4499796"/>
               <a:ext cx="49651" cy="49651"/>
             </a:xfrm>
             <a:prstGeom prst="ellipse">
@@ -6386,7 +6386,7 @@
           </p:nvSpPr>
           <p:spPr>
             <a:xfrm>
-              <a:off x="3436397" y="4499796"/>
+              <a:off x="5907610" y="3855548"/>
               <a:ext cx="49651" cy="49651"/>
             </a:xfrm>
             <a:prstGeom prst="ellipse">
@@ -6421,7 +6421,7 @@
           </p:nvSpPr>
           <p:spPr>
             <a:xfrm>
-              <a:off x="5907610" y="3855548"/>
+              <a:off x="4471412" y="4410928"/>
               <a:ext cx="49651" cy="49651"/>
             </a:xfrm>
             <a:prstGeom prst="ellipse">
@@ -6456,7 +6456,7 @@
           </p:nvSpPr>
           <p:spPr>
             <a:xfrm>
-              <a:off x="4471412" y="4410928"/>
+              <a:off x="4539365" y="4264387"/>
               <a:ext cx="49651" cy="49651"/>
             </a:xfrm>
             <a:prstGeom prst="ellipse">
@@ -6491,7 +6491,7 @@
           </p:nvSpPr>
           <p:spPr>
             <a:xfrm>
-              <a:off x="4539365" y="4264387"/>
+              <a:off x="4974482" y="3344681"/>
               <a:ext cx="49651" cy="49651"/>
             </a:xfrm>
             <a:prstGeom prst="ellipse">
@@ -6526,7 +6526,7 @@
           </p:nvSpPr>
           <p:spPr>
             <a:xfrm>
-              <a:off x="4974482" y="3344681"/>
+              <a:off x="6951102" y="4445833"/>
               <a:ext cx="49651" cy="49651"/>
             </a:xfrm>
             <a:prstGeom prst="ellipse">
@@ -6561,7 +6561,7 @@
           </p:nvSpPr>
           <p:spPr>
             <a:xfrm>
-              <a:off x="6951102" y="4445833"/>
+              <a:off x="3772039" y="3646555"/>
               <a:ext cx="49651" cy="49651"/>
             </a:xfrm>
             <a:prstGeom prst="ellipse">
@@ -6596,7 +6596,7 @@
           </p:nvSpPr>
           <p:spPr>
             <a:xfrm>
-              <a:off x="3772039" y="3646555"/>
+              <a:off x="5825470" y="4433986"/>
               <a:ext cx="49651" cy="49651"/>
             </a:xfrm>
             <a:prstGeom prst="ellipse">
@@ -6631,7 +6631,7 @@
           </p:nvSpPr>
           <p:spPr>
             <a:xfrm>
-              <a:off x="5825470" y="4433986"/>
+              <a:off x="5392798" y="4353195"/>
               <a:ext cx="49651" cy="49651"/>
             </a:xfrm>
             <a:prstGeom prst="ellipse">
@@ -6666,7 +6666,7 @@
           </p:nvSpPr>
           <p:spPr>
             <a:xfrm>
-              <a:off x="5392798" y="4353195"/>
+              <a:off x="5427052" y="4501817"/>
               <a:ext cx="49651" cy="49651"/>
             </a:xfrm>
             <a:prstGeom prst="ellipse">
@@ -6701,7 +6701,7 @@
           </p:nvSpPr>
           <p:spPr>
             <a:xfrm>
-              <a:off x="5427052" y="4501817"/>
+              <a:off x="3487776" y="4926349"/>
               <a:ext cx="49651" cy="49651"/>
             </a:xfrm>
             <a:prstGeom prst="ellipse">
@@ -6736,7 +6736,7 @@
           </p:nvSpPr>
           <p:spPr>
             <a:xfrm>
-              <a:off x="3487776" y="4926349"/>
+              <a:off x="3771643" y="4121146"/>
               <a:ext cx="49651" cy="49651"/>
             </a:xfrm>
             <a:prstGeom prst="ellipse">
@@ -6771,7 +6771,7 @@
           </p:nvSpPr>
           <p:spPr>
             <a:xfrm>
-              <a:off x="3771643" y="4121146"/>
+              <a:off x="5131855" y="4959254"/>
               <a:ext cx="49651" cy="49651"/>
             </a:xfrm>
             <a:prstGeom prst="ellipse">
@@ -6806,7 +6806,7 @@
           </p:nvSpPr>
           <p:spPr>
             <a:xfrm>
-              <a:off x="5131855" y="4959254"/>
+              <a:off x="7477049" y="4445833"/>
               <a:ext cx="49651" cy="49651"/>
             </a:xfrm>
             <a:prstGeom prst="ellipse">
@@ -6841,7 +6841,7 @@
           </p:nvSpPr>
           <p:spPr>
             <a:xfrm>
-              <a:off x="7477049" y="4445833"/>
+              <a:off x="7488672" y="4445833"/>
               <a:ext cx="49651" cy="49651"/>
             </a:xfrm>
             <a:prstGeom prst="ellipse">
@@ -6876,7 +6876,7 @@
           </p:nvSpPr>
           <p:spPr>
             <a:xfrm>
-              <a:off x="7488672" y="4445833"/>
+              <a:off x="5750374" y="3748356"/>
               <a:ext cx="49651" cy="49651"/>
             </a:xfrm>
             <a:prstGeom prst="ellipse">
@@ -6911,7 +6911,7 @@
           </p:nvSpPr>
           <p:spPr>
             <a:xfrm>
-              <a:off x="5750374" y="3748356"/>
+              <a:off x="6235362" y="4217579"/>
               <a:ext cx="49651" cy="49651"/>
             </a:xfrm>
             <a:prstGeom prst="ellipse">
@@ -6946,7 +6946,7 @@
           </p:nvSpPr>
           <p:spPr>
             <a:xfrm>
-              <a:off x="6235362" y="4217579"/>
+              <a:off x="5194212" y="4335002"/>
               <a:ext cx="49651" cy="49651"/>
             </a:xfrm>
             <a:prstGeom prst="ellipse">
@@ -6981,7 +6981,7 @@
           </p:nvSpPr>
           <p:spPr>
             <a:xfrm>
-              <a:off x="5194212" y="4335002"/>
+              <a:off x="5279707" y="3427490"/>
               <a:ext cx="49651" cy="49651"/>
             </a:xfrm>
             <a:prstGeom prst="ellipse">
@@ -7016,7 +7016,7 @@
           </p:nvSpPr>
           <p:spPr>
             <a:xfrm>
-              <a:off x="5279707" y="3427490"/>
+              <a:off x="4771538" y="4624715"/>
               <a:ext cx="49651" cy="49651"/>
             </a:xfrm>
             <a:prstGeom prst="ellipse">
@@ -7051,7 +7051,7 @@
           </p:nvSpPr>
           <p:spPr>
             <a:xfrm>
-              <a:off x="4771538" y="4624715"/>
+              <a:off x="4920380" y="4625159"/>
               <a:ext cx="49651" cy="49651"/>
             </a:xfrm>
             <a:prstGeom prst="ellipse">
@@ -7086,7 +7086,7 @@
           </p:nvSpPr>
           <p:spPr>
             <a:xfrm>
-              <a:off x="4920380" y="4625159"/>
+              <a:off x="4096971" y="3033369"/>
               <a:ext cx="49651" cy="49651"/>
             </a:xfrm>
             <a:prstGeom prst="ellipse">
@@ -7121,7 +7121,7 @@
           </p:nvSpPr>
           <p:spPr>
             <a:xfrm>
-              <a:off x="4096971" y="3033369"/>
+              <a:off x="2353377" y="4446898"/>
               <a:ext cx="49651" cy="49651"/>
             </a:xfrm>
             <a:prstGeom prst="ellipse">
@@ -7156,7 +7156,7 @@
           </p:nvSpPr>
           <p:spPr>
             <a:xfrm>
-              <a:off x="2353377" y="4446898"/>
+              <a:off x="3546691" y="4723173"/>
               <a:ext cx="49651" cy="49651"/>
             </a:xfrm>
             <a:prstGeom prst="ellipse">
@@ -7191,7 +7191,7 @@
           </p:nvSpPr>
           <p:spPr>
             <a:xfrm>
-              <a:off x="3546691" y="4723173"/>
+              <a:off x="4490142" y="2889224"/>
               <a:ext cx="49651" cy="49651"/>
             </a:xfrm>
             <a:prstGeom prst="ellipse">
@@ -7226,7 +7226,7 @@
           </p:nvSpPr>
           <p:spPr>
             <a:xfrm>
-              <a:off x="4490142" y="2889224"/>
+              <a:off x="5412309" y="3517888"/>
               <a:ext cx="49651" cy="49651"/>
             </a:xfrm>
             <a:prstGeom prst="ellipse">
@@ -7261,7 +7261,7 @@
           </p:nvSpPr>
           <p:spPr>
             <a:xfrm>
-              <a:off x="5412309" y="3517888"/>
+              <a:off x="4455975" y="3974488"/>
               <a:ext cx="49651" cy="49651"/>
             </a:xfrm>
             <a:prstGeom prst="ellipse">
@@ -7296,7 +7296,7 @@
           </p:nvSpPr>
           <p:spPr>
             <a:xfrm>
-              <a:off x="4455975" y="3974488"/>
+              <a:off x="4354023" y="4721398"/>
               <a:ext cx="49651" cy="49651"/>
             </a:xfrm>
             <a:prstGeom prst="ellipse">
@@ -7331,7 +7331,7 @@
           </p:nvSpPr>
           <p:spPr>
             <a:xfrm>
-              <a:off x="4354023" y="4721398"/>
+              <a:off x="5234549" y="3715943"/>
               <a:ext cx="49651" cy="49651"/>
             </a:xfrm>
             <a:prstGeom prst="ellipse">
@@ -7366,7 +7366,7 @@
           </p:nvSpPr>
           <p:spPr>
             <a:xfrm>
-              <a:off x="5234549" y="3715943"/>
+              <a:off x="5531611" y="4181122"/>
               <a:ext cx="49651" cy="49651"/>
             </a:xfrm>
             <a:prstGeom prst="ellipse">
@@ -7401,7 +7401,7 @@
           </p:nvSpPr>
           <p:spPr>
             <a:xfrm>
-              <a:off x="5531611" y="4181122"/>
+              <a:off x="6799783" y="4445833"/>
               <a:ext cx="49651" cy="49651"/>
             </a:xfrm>
             <a:prstGeom prst="ellipse">
@@ -7436,7 +7436,7 @@
           </p:nvSpPr>
           <p:spPr>
             <a:xfrm>
-              <a:off x="6799783" y="4445833"/>
+              <a:off x="1713945" y="3831071"/>
               <a:ext cx="49651" cy="49651"/>
             </a:xfrm>
             <a:prstGeom prst="ellipse">
@@ -7471,7 +7471,7 @@
           </p:nvSpPr>
           <p:spPr>
             <a:xfrm>
-              <a:off x="1713945" y="3831071"/>
+              <a:off x="3499290" y="3898825"/>
               <a:ext cx="49651" cy="49651"/>
             </a:xfrm>
             <a:prstGeom prst="ellipse">
@@ -7506,7 +7506,7 @@
           </p:nvSpPr>
           <p:spPr>
             <a:xfrm>
-              <a:off x="3499290" y="3898825"/>
+              <a:off x="6605095" y="5038214"/>
               <a:ext cx="49651" cy="49651"/>
             </a:xfrm>
             <a:prstGeom prst="ellipse">
@@ -7541,7 +7541,7 @@
           </p:nvSpPr>
           <p:spPr>
             <a:xfrm>
-              <a:off x="6605095" y="5038214"/>
+              <a:off x="6928671" y="4445833"/>
               <a:ext cx="49651" cy="49651"/>
             </a:xfrm>
             <a:prstGeom prst="ellipse">
@@ -7576,7 +7576,7 @@
           </p:nvSpPr>
           <p:spPr>
             <a:xfrm>
-              <a:off x="6928671" y="4445833"/>
+              <a:off x="3333344" y="3528419"/>
               <a:ext cx="49651" cy="49651"/>
             </a:xfrm>
             <a:prstGeom prst="ellipse">
@@ -7611,7 +7611,7 @@
           </p:nvSpPr>
           <p:spPr>
             <a:xfrm>
-              <a:off x="3333344" y="3528419"/>
+              <a:off x="2810227" y="4654316"/>
               <a:ext cx="49651" cy="49651"/>
             </a:xfrm>
             <a:prstGeom prst="ellipse">
@@ -7646,7 +7646,7 @@
           </p:nvSpPr>
           <p:spPr>
             <a:xfrm>
-              <a:off x="2810227" y="4654316"/>
+              <a:off x="4254128" y="5237120"/>
               <a:ext cx="49651" cy="49651"/>
             </a:xfrm>
             <a:prstGeom prst="ellipse">
@@ -7681,7 +7681,7 @@
           </p:nvSpPr>
           <p:spPr>
             <a:xfrm>
-              <a:off x="4254128" y="5237120"/>
+              <a:off x="8245197" y="4445833"/>
               <a:ext cx="49651" cy="49651"/>
             </a:xfrm>
             <a:prstGeom prst="ellipse">
@@ -7716,7 +7716,7 @@
           </p:nvSpPr>
           <p:spPr>
             <a:xfrm>
-              <a:off x="8245197" y="4445833"/>
+              <a:off x="1301453" y="3430954"/>
               <a:ext cx="49651" cy="49651"/>
             </a:xfrm>
             <a:prstGeom prst="ellipse">
@@ -7751,7 +7751,7 @@
           </p:nvSpPr>
           <p:spPr>
             <a:xfrm>
-              <a:off x="1301453" y="3430954"/>
+              <a:off x="3482517" y="4772366"/>
               <a:ext cx="49651" cy="49651"/>
             </a:xfrm>
             <a:prstGeom prst="ellipse">
@@ -7786,7 +7786,7 @@
           </p:nvSpPr>
           <p:spPr>
             <a:xfrm>
-              <a:off x="3482517" y="4772366"/>
+              <a:off x="5783996" y="5367467"/>
               <a:ext cx="49651" cy="49651"/>
             </a:xfrm>
             <a:prstGeom prst="ellipse">
@@ -7821,7 +7821,7 @@
           </p:nvSpPr>
           <p:spPr>
             <a:xfrm>
-              <a:off x="5783996" y="5367467"/>
+              <a:off x="5974749" y="3901318"/>
               <a:ext cx="49651" cy="49651"/>
             </a:xfrm>
             <a:prstGeom prst="ellipse">
@@ -7856,7 +7856,7 @@
           </p:nvSpPr>
           <p:spPr>
             <a:xfrm>
-              <a:off x="5974749" y="3901318"/>
+              <a:off x="4751977" y="4533276"/>
               <a:ext cx="49651" cy="49651"/>
             </a:xfrm>
             <a:prstGeom prst="ellipse">
@@ -7891,7 +7891,7 @@
           </p:nvSpPr>
           <p:spPr>
             <a:xfrm>
-              <a:off x="4751977" y="4533276"/>
+              <a:off x="6896496" y="4817603"/>
               <a:ext cx="49651" cy="49651"/>
             </a:xfrm>
             <a:prstGeom prst="ellipse">
@@ -7926,7 +7926,7 @@
           </p:nvSpPr>
           <p:spPr>
             <a:xfrm>
-              <a:off x="6896496" y="4817603"/>
+              <a:off x="3654191" y="4849148"/>
               <a:ext cx="49651" cy="49651"/>
             </a:xfrm>
             <a:prstGeom prst="ellipse">
@@ -7961,7 +7961,7 @@
           </p:nvSpPr>
           <p:spPr>
             <a:xfrm>
-              <a:off x="3654191" y="4849148"/>
+              <a:off x="5537737" y="4662134"/>
               <a:ext cx="49651" cy="49651"/>
             </a:xfrm>
             <a:prstGeom prst="ellipse">
@@ -7996,7 +7996,7 @@
           </p:nvSpPr>
           <p:spPr>
             <a:xfrm>
-              <a:off x="5537737" y="4662134"/>
+              <a:off x="7374190" y="4445833"/>
               <a:ext cx="49651" cy="49651"/>
             </a:xfrm>
             <a:prstGeom prst="ellipse">
@@ -8031,7 +8031,7 @@
           </p:nvSpPr>
           <p:spPr>
             <a:xfrm>
-              <a:off x="7374190" y="4445833"/>
+              <a:off x="7808714" y="4445833"/>
               <a:ext cx="49651" cy="49651"/>
             </a:xfrm>
             <a:prstGeom prst="ellipse">
@@ -8066,41 +8066,6 @@
           </p:nvSpPr>
           <p:spPr>
             <a:xfrm>
-              <a:off x="7808714" y="4445833"/>
-              <a:ext cx="49651" cy="49651"/>
-            </a:xfrm>
-            <a:prstGeom prst="ellipse">
-              <a:avLst/>
-            </a:prstGeom>
-            <a:solidFill>
-              <a:srgbClr val="000000">
-                <a:alpha val="29803"/>
-              </a:srgbClr>
-            </a:solidFill>
-            <a:ln w="9000" cap="rnd">
-              <a:solidFill>
-                <a:srgbClr val="000000">
-                  <a:alpha val="29803"/>
-                </a:srgbClr>
-              </a:solidFill>
-              <a:prstDash val="solid"/>
-              <a:round/>
-            </a:ln>
-          </p:spPr>
-          <p:txBody>
-            <a:bodyPr/>
-            <a:lstStyle/>
-            <a:p/>
-          </p:txBody>
-        </p:sp>
-        <p:sp>
-          <p:nvSpPr>
-            <p:cNvPr id="166" name="pt166"/>
-            <p:cNvSpPr/>
-            <p:nvPr/>
-          </p:nvSpPr>
-          <p:spPr>
-            <a:xfrm>
               <a:off x="5015370" y="3821105"/>
               <a:ext cx="49651" cy="49651"/>
             </a:xfrm>
@@ -8130,498 +8095,498 @@
         </p:sp>
         <p:sp>
           <p:nvSpPr>
-            <p:cNvPr id="167" name="pg167"/>
-            <p:cNvSpPr/>
-            <p:nvPr/>
-          </p:nvSpPr>
-          <p:spPr>
-            <a:xfrm>
-              <a:off x="1326279" y="4095022"/>
-              <a:ext cx="6943744" cy="823874"/>
+            <p:cNvPr id="166" name="pg166"/>
+            <p:cNvSpPr/>
+            <p:nvPr/>
+          </p:nvSpPr>
+          <p:spPr>
+            <a:xfrm>
+              <a:off x="1326279" y="4107257"/>
+              <a:ext cx="6943744" cy="802940"/>
             </a:xfrm>
             <a:custGeom>
               <a:avLst/>
               <a:pathLst>
-                <a:path w="6943744" h="823874">
+                <a:path w="6943744" h="802940">
                   <a:moveTo>
                     <a:pt x="0" y="0"/>
                   </a:moveTo>
                   <a:lnTo>
-                    <a:pt x="87895" y="9544"/>
-                  </a:lnTo>
-                  <a:lnTo>
-                    <a:pt x="175790" y="19067"/>
-                  </a:lnTo>
-                  <a:lnTo>
-                    <a:pt x="263686" y="28567"/>
-                  </a:lnTo>
-                  <a:lnTo>
-                    <a:pt x="351581" y="38042"/>
-                  </a:lnTo>
-                  <a:lnTo>
-                    <a:pt x="439477" y="47490"/>
-                  </a:lnTo>
-                  <a:lnTo>
-                    <a:pt x="527372" y="56910"/>
-                  </a:lnTo>
-                  <a:lnTo>
-                    <a:pt x="615268" y="66298"/>
-                  </a:lnTo>
-                  <a:lnTo>
-                    <a:pt x="703163" y="75654"/>
-                  </a:lnTo>
-                  <a:lnTo>
-                    <a:pt x="791059" y="84973"/>
-                  </a:lnTo>
-                  <a:lnTo>
-                    <a:pt x="878954" y="94253"/>
-                  </a:lnTo>
-                  <a:lnTo>
-                    <a:pt x="966850" y="103491"/>
-                  </a:lnTo>
-                  <a:lnTo>
-                    <a:pt x="1054745" y="112683"/>
-                  </a:lnTo>
-                  <a:lnTo>
-                    <a:pt x="1142641" y="121825"/>
-                  </a:lnTo>
-                  <a:lnTo>
-                    <a:pt x="1230536" y="130912"/>
-                  </a:lnTo>
-                  <a:lnTo>
-                    <a:pt x="1318432" y="139940"/>
-                  </a:lnTo>
-                  <a:lnTo>
-                    <a:pt x="1406327" y="148903"/>
-                  </a:lnTo>
-                  <a:lnTo>
-                    <a:pt x="1494223" y="157794"/>
-                  </a:lnTo>
-                  <a:lnTo>
-                    <a:pt x="1582118" y="166607"/>
-                  </a:lnTo>
-                  <a:lnTo>
-                    <a:pt x="1670014" y="175334"/>
-                  </a:lnTo>
-                  <a:lnTo>
-                    <a:pt x="1757909" y="183967"/>
-                  </a:lnTo>
-                  <a:lnTo>
-                    <a:pt x="1845805" y="192495"/>
-                  </a:lnTo>
-                  <a:lnTo>
-                    <a:pt x="1933700" y="200909"/>
-                  </a:lnTo>
-                  <a:lnTo>
-                    <a:pt x="2021596" y="209197"/>
-                  </a:lnTo>
-                  <a:lnTo>
-                    <a:pt x="2109491" y="217344"/>
-                  </a:lnTo>
-                  <a:lnTo>
-                    <a:pt x="2197387" y="225338"/>
-                  </a:lnTo>
-                  <a:lnTo>
-                    <a:pt x="2285282" y="233161"/>
-                  </a:lnTo>
-                  <a:lnTo>
-                    <a:pt x="2373178" y="240797"/>
-                  </a:lnTo>
-                  <a:lnTo>
-                    <a:pt x="2461073" y="248227"/>
-                  </a:lnTo>
-                  <a:lnTo>
-                    <a:pt x="2548969" y="255429"/>
-                  </a:lnTo>
-                  <a:lnTo>
-                    <a:pt x="2636864" y="262383"/>
-                  </a:lnTo>
-                  <a:lnTo>
-                    <a:pt x="2724760" y="269067"/>
-                  </a:lnTo>
-                  <a:lnTo>
-                    <a:pt x="2812655" y="275456"/>
-                  </a:lnTo>
-                  <a:lnTo>
-                    <a:pt x="2900551" y="281528"/>
-                  </a:lnTo>
-                  <a:lnTo>
-                    <a:pt x="2988446" y="287262"/>
-                  </a:lnTo>
-                  <a:lnTo>
-                    <a:pt x="3076342" y="292635"/>
-                  </a:lnTo>
-                  <a:lnTo>
-                    <a:pt x="3164237" y="297631"/>
-                  </a:lnTo>
-                  <a:lnTo>
-                    <a:pt x="3252133" y="302235"/>
-                  </a:lnTo>
-                  <a:lnTo>
-                    <a:pt x="3340028" y="306436"/>
-                  </a:lnTo>
-                  <a:lnTo>
-                    <a:pt x="3427924" y="310228"/>
-                  </a:lnTo>
-                  <a:lnTo>
-                    <a:pt x="3515819" y="313613"/>
-                  </a:lnTo>
-                  <a:lnTo>
-                    <a:pt x="3603715" y="316594"/>
-                  </a:lnTo>
-                  <a:lnTo>
-                    <a:pt x="3691610" y="319182"/>
-                  </a:lnTo>
-                  <a:lnTo>
-                    <a:pt x="3779506" y="321391"/>
-                  </a:lnTo>
-                  <a:lnTo>
-                    <a:pt x="3867401" y="323238"/>
-                  </a:lnTo>
-                  <a:lnTo>
-                    <a:pt x="3955297" y="324745"/>
-                  </a:lnTo>
-                  <a:lnTo>
-                    <a:pt x="4043192" y="325933"/>
-                  </a:lnTo>
-                  <a:lnTo>
-                    <a:pt x="4131088" y="326825"/>
-                  </a:lnTo>
-                  <a:lnTo>
-                    <a:pt x="4218983" y="327445"/>
-                  </a:lnTo>
-                  <a:lnTo>
-                    <a:pt x="4306879" y="327814"/>
-                  </a:lnTo>
-                  <a:lnTo>
-                    <a:pt x="4394774" y="327955"/>
-                  </a:lnTo>
-                  <a:lnTo>
-                    <a:pt x="4482670" y="327888"/>
-                  </a:lnTo>
-                  <a:lnTo>
-                    <a:pt x="4570565" y="327632"/>
-                  </a:lnTo>
-                  <a:lnTo>
-                    <a:pt x="4658461" y="327204"/>
-                  </a:lnTo>
-                  <a:lnTo>
-                    <a:pt x="4746356" y="326621"/>
-                  </a:lnTo>
-                  <a:lnTo>
-                    <a:pt x="4834252" y="325897"/>
-                  </a:lnTo>
-                  <a:lnTo>
-                    <a:pt x="4922147" y="325046"/>
-                  </a:lnTo>
-                  <a:lnTo>
-                    <a:pt x="5010043" y="324079"/>
-                  </a:lnTo>
-                  <a:lnTo>
-                    <a:pt x="5097938" y="323007"/>
-                  </a:lnTo>
-                  <a:lnTo>
-                    <a:pt x="5185834" y="321840"/>
-                  </a:lnTo>
-                  <a:lnTo>
-                    <a:pt x="5273729" y="320587"/>
-                  </a:lnTo>
-                  <a:lnTo>
-                    <a:pt x="5361625" y="319254"/>
-                  </a:lnTo>
-                  <a:lnTo>
-                    <a:pt x="5449520" y="317850"/>
-                  </a:lnTo>
-                  <a:lnTo>
-                    <a:pt x="5537416" y="316380"/>
-                  </a:lnTo>
-                  <a:lnTo>
-                    <a:pt x="5625311" y="314850"/>
-                  </a:lnTo>
-                  <a:lnTo>
-                    <a:pt x="5713207" y="313266"/>
-                  </a:lnTo>
-                  <a:lnTo>
-                    <a:pt x="5801102" y="311630"/>
-                  </a:lnTo>
-                  <a:lnTo>
-                    <a:pt x="5888998" y="309949"/>
-                  </a:lnTo>
-                  <a:lnTo>
-                    <a:pt x="5976893" y="308225"/>
-                  </a:lnTo>
-                  <a:lnTo>
-                    <a:pt x="6064789" y="306461"/>
-                  </a:lnTo>
-                  <a:lnTo>
-                    <a:pt x="6152684" y="304662"/>
-                  </a:lnTo>
-                  <a:lnTo>
-                    <a:pt x="6240580" y="302828"/>
-                  </a:lnTo>
-                  <a:lnTo>
-                    <a:pt x="6328475" y="300964"/>
-                  </a:lnTo>
-                  <a:lnTo>
-                    <a:pt x="6416371" y="299071"/>
-                  </a:lnTo>
-                  <a:lnTo>
-                    <a:pt x="6504266" y="297151"/>
-                  </a:lnTo>
-                  <a:lnTo>
-                    <a:pt x="6592162" y="295206"/>
-                  </a:lnTo>
-                  <a:lnTo>
-                    <a:pt x="6680057" y="293238"/>
-                  </a:lnTo>
-                  <a:lnTo>
-                    <a:pt x="6767953" y="291248"/>
-                  </a:lnTo>
-                  <a:lnTo>
-                    <a:pt x="6855848" y="289238"/>
-                  </a:lnTo>
-                  <a:lnTo>
-                    <a:pt x="6943744" y="287209"/>
-                  </a:lnTo>
-                  <a:lnTo>
-                    <a:pt x="6943744" y="823874"/>
-                  </a:lnTo>
-                  <a:lnTo>
-                    <a:pt x="6855848" y="814292"/>
-                  </a:lnTo>
-                  <a:lnTo>
-                    <a:pt x="6767953" y="804729"/>
-                  </a:lnTo>
-                  <a:lnTo>
-                    <a:pt x="6680057" y="795186"/>
-                  </a:lnTo>
-                  <a:lnTo>
-                    <a:pt x="6592162" y="785665"/>
-                  </a:lnTo>
-                  <a:lnTo>
-                    <a:pt x="6504266" y="776167"/>
-                  </a:lnTo>
-                  <a:lnTo>
-                    <a:pt x="6416371" y="766694"/>
-                  </a:lnTo>
-                  <a:lnTo>
-                    <a:pt x="6328475" y="757248"/>
-                  </a:lnTo>
-                  <a:lnTo>
-                    <a:pt x="6240580" y="747831"/>
-                  </a:lnTo>
-                  <a:lnTo>
-                    <a:pt x="6152684" y="738444"/>
-                  </a:lnTo>
-                  <a:lnTo>
-                    <a:pt x="6064789" y="729092"/>
-                  </a:lnTo>
-                  <a:lnTo>
-                    <a:pt x="5976893" y="719775"/>
-                  </a:lnTo>
-                  <a:lnTo>
-                    <a:pt x="5888998" y="710498"/>
-                  </a:lnTo>
-                  <a:lnTo>
-                    <a:pt x="5801102" y="701264"/>
-                  </a:lnTo>
-                  <a:lnTo>
-                    <a:pt x="5713207" y="692076"/>
-                  </a:lnTo>
-                  <a:lnTo>
-                    <a:pt x="5625311" y="682938"/>
-                  </a:lnTo>
-                  <a:lnTo>
-                    <a:pt x="5537416" y="673856"/>
-                  </a:lnTo>
-                  <a:lnTo>
-                    <a:pt x="5449520" y="664833"/>
-                  </a:lnTo>
-                  <a:lnTo>
-                    <a:pt x="5361625" y="655876"/>
-                  </a:lnTo>
-                  <a:lnTo>
-                    <a:pt x="5273729" y="646990"/>
-                  </a:lnTo>
-                  <a:lnTo>
-                    <a:pt x="5185834" y="638184"/>
-                  </a:lnTo>
-                  <a:lnTo>
-                    <a:pt x="5097938" y="629464"/>
-                  </a:lnTo>
-                  <a:lnTo>
-                    <a:pt x="5010043" y="620839"/>
-                  </a:lnTo>
-                  <a:lnTo>
-                    <a:pt x="4922147" y="612319"/>
-                  </a:lnTo>
-                  <a:lnTo>
-                    <a:pt x="4834252" y="603915"/>
-                  </a:lnTo>
-                  <a:lnTo>
-                    <a:pt x="4746356" y="595639"/>
-                  </a:lnTo>
-                  <a:lnTo>
-                    <a:pt x="4658461" y="587503"/>
-                  </a:lnTo>
-                  <a:lnTo>
-                    <a:pt x="4570565" y="579522"/>
-                  </a:lnTo>
-                  <a:lnTo>
-                    <a:pt x="4482670" y="571713"/>
-                  </a:lnTo>
-                  <a:lnTo>
-                    <a:pt x="4394774" y="564093"/>
-                  </a:lnTo>
-                  <a:lnTo>
-                    <a:pt x="4306879" y="556681"/>
-                  </a:lnTo>
-                  <a:lnTo>
-                    <a:pt x="4218983" y="549497"/>
-                  </a:lnTo>
-                  <a:lnTo>
-                    <a:pt x="4131088" y="542564"/>
-                  </a:lnTo>
-                  <a:lnTo>
-                    <a:pt x="4043192" y="535903"/>
-                  </a:lnTo>
-                  <a:lnTo>
-                    <a:pt x="3955297" y="529538"/>
-                  </a:lnTo>
-                  <a:lnTo>
-                    <a:pt x="3867401" y="523492"/>
-                  </a:lnTo>
-                  <a:lnTo>
-                    <a:pt x="3779506" y="517787"/>
-                  </a:lnTo>
-                  <a:lnTo>
-                    <a:pt x="3691610" y="512443"/>
-                  </a:lnTo>
-                  <a:lnTo>
-                    <a:pt x="3603715" y="507478"/>
-                  </a:lnTo>
-                  <a:lnTo>
-                    <a:pt x="3515819" y="502906"/>
-                  </a:lnTo>
-                  <a:lnTo>
-                    <a:pt x="3427924" y="498738"/>
-                  </a:lnTo>
-                  <a:lnTo>
-                    <a:pt x="3340028" y="494978"/>
-                  </a:lnTo>
-                  <a:lnTo>
-                    <a:pt x="3252133" y="491625"/>
-                  </a:lnTo>
-                  <a:lnTo>
-                    <a:pt x="3164237" y="488676"/>
-                  </a:lnTo>
-                  <a:lnTo>
-                    <a:pt x="3076342" y="486119"/>
-                  </a:lnTo>
-                  <a:lnTo>
-                    <a:pt x="2988446" y="483940"/>
-                  </a:lnTo>
-                  <a:lnTo>
-                    <a:pt x="2900551" y="482120"/>
-                  </a:lnTo>
-                  <a:lnTo>
-                    <a:pt x="2812655" y="480640"/>
-                  </a:lnTo>
-                  <a:lnTo>
-                    <a:pt x="2724760" y="479476"/>
-                  </a:lnTo>
-                  <a:lnTo>
-                    <a:pt x="2636864" y="478606"/>
-                  </a:lnTo>
-                  <a:lnTo>
-                    <a:pt x="2548969" y="478008"/>
-                  </a:lnTo>
-                  <a:lnTo>
-                    <a:pt x="2461073" y="477657"/>
-                  </a:lnTo>
-                  <a:lnTo>
-                    <a:pt x="2373178" y="477534"/>
-                  </a:lnTo>
-                  <a:lnTo>
-                    <a:pt x="2285282" y="477617"/>
-                  </a:lnTo>
-                  <a:lnTo>
-                    <a:pt x="2197387" y="477887"/>
-                  </a:lnTo>
-                  <a:lnTo>
-                    <a:pt x="2109491" y="478328"/>
-                  </a:lnTo>
-                  <a:lnTo>
-                    <a:pt x="2021596" y="478923"/>
-                  </a:lnTo>
-                  <a:lnTo>
-                    <a:pt x="1933700" y="479657"/>
-                  </a:lnTo>
-                  <a:lnTo>
-                    <a:pt x="1845805" y="480518"/>
-                  </a:lnTo>
-                  <a:lnTo>
-                    <a:pt x="1757909" y="481494"/>
-                  </a:lnTo>
-                  <a:lnTo>
-                    <a:pt x="1670014" y="482574"/>
-                  </a:lnTo>
-                  <a:lnTo>
-                    <a:pt x="1582118" y="483748"/>
-                  </a:lnTo>
-                  <a:lnTo>
-                    <a:pt x="1494223" y="485008"/>
-                  </a:lnTo>
-                  <a:lnTo>
-                    <a:pt x="1406327" y="486346"/>
-                  </a:lnTo>
-                  <a:lnTo>
-                    <a:pt x="1318432" y="487756"/>
-                  </a:lnTo>
-                  <a:lnTo>
-                    <a:pt x="1230536" y="489231"/>
-                  </a:lnTo>
-                  <a:lnTo>
-                    <a:pt x="1142641" y="490765"/>
-                  </a:lnTo>
-                  <a:lnTo>
-                    <a:pt x="1054745" y="492354"/>
-                  </a:lnTo>
-                  <a:lnTo>
-                    <a:pt x="966850" y="493993"/>
-                  </a:lnTo>
-                  <a:lnTo>
-                    <a:pt x="878954" y="495678"/>
-                  </a:lnTo>
-                  <a:lnTo>
-                    <a:pt x="791059" y="497406"/>
-                  </a:lnTo>
-                  <a:lnTo>
-                    <a:pt x="703163" y="499172"/>
-                  </a:lnTo>
-                  <a:lnTo>
-                    <a:pt x="615268" y="500975"/>
-                  </a:lnTo>
-                  <a:lnTo>
-                    <a:pt x="527372" y="502810"/>
-                  </a:lnTo>
-                  <a:lnTo>
-                    <a:pt x="439477" y="504677"/>
-                  </a:lnTo>
-                  <a:lnTo>
-                    <a:pt x="351581" y="506573"/>
-                  </a:lnTo>
-                  <a:lnTo>
-                    <a:pt x="263686" y="508495"/>
-                  </a:lnTo>
-                  <a:lnTo>
-                    <a:pt x="175790" y="510442"/>
-                  </a:lnTo>
-                  <a:lnTo>
-                    <a:pt x="87895" y="512412"/>
-                  </a:lnTo>
-                  <a:lnTo>
-                    <a:pt x="0" y="514403"/>
+                    <a:pt x="87895" y="9283"/>
+                  </a:lnTo>
+                  <a:lnTo>
+                    <a:pt x="175790" y="18545"/>
+                  </a:lnTo>
+                  <a:lnTo>
+                    <a:pt x="263686" y="27785"/>
+                  </a:lnTo>
+                  <a:lnTo>
+                    <a:pt x="351581" y="36999"/>
+                  </a:lnTo>
+                  <a:lnTo>
+                    <a:pt x="439477" y="46188"/>
+                  </a:lnTo>
+                  <a:lnTo>
+                    <a:pt x="527372" y="55348"/>
+                  </a:lnTo>
+                  <a:lnTo>
+                    <a:pt x="615268" y="64478"/>
+                  </a:lnTo>
+                  <a:lnTo>
+                    <a:pt x="703163" y="73574"/>
+                  </a:lnTo>
+                  <a:lnTo>
+                    <a:pt x="791059" y="82635"/>
+                  </a:lnTo>
+                  <a:lnTo>
+                    <a:pt x="878954" y="91658"/>
+                  </a:lnTo>
+                  <a:lnTo>
+                    <a:pt x="966850" y="100638"/>
+                  </a:lnTo>
+                  <a:lnTo>
+                    <a:pt x="1054745" y="109573"/>
+                  </a:lnTo>
+                  <a:lnTo>
+                    <a:pt x="1142641" y="118459"/>
+                  </a:lnTo>
+                  <a:lnTo>
+                    <a:pt x="1230536" y="127290"/>
+                  </a:lnTo>
+                  <a:lnTo>
+                    <a:pt x="1318432" y="136063"/>
+                  </a:lnTo>
+                  <a:lnTo>
+                    <a:pt x="1406327" y="144771"/>
+                  </a:lnTo>
+                  <a:lnTo>
+                    <a:pt x="1494223" y="153409"/>
+                  </a:lnTo>
+                  <a:lnTo>
+                    <a:pt x="1582118" y="161970"/>
+                  </a:lnTo>
+                  <a:lnTo>
+                    <a:pt x="1670014" y="170445"/>
+                  </a:lnTo>
+                  <a:lnTo>
+                    <a:pt x="1757909" y="178827"/>
+                  </a:lnTo>
+                  <a:lnTo>
+                    <a:pt x="1845805" y="187107"/>
+                  </a:lnTo>
+                  <a:lnTo>
+                    <a:pt x="1933700" y="195272"/>
+                  </a:lnTo>
+                  <a:lnTo>
+                    <a:pt x="2021596" y="203313"/>
+                  </a:lnTo>
+                  <a:lnTo>
+                    <a:pt x="2109491" y="211215"/>
+                  </a:lnTo>
+                  <a:lnTo>
+                    <a:pt x="2197387" y="218964"/>
+                  </a:lnTo>
+                  <a:lnTo>
+                    <a:pt x="2285282" y="226545"/>
+                  </a:lnTo>
+                  <a:lnTo>
+                    <a:pt x="2373178" y="233940"/>
+                  </a:lnTo>
+                  <a:lnTo>
+                    <a:pt x="2461073" y="241129"/>
+                  </a:lnTo>
+                  <a:lnTo>
+                    <a:pt x="2548969" y="248093"/>
+                  </a:lnTo>
+                  <a:lnTo>
+                    <a:pt x="2636864" y="254809"/>
+                  </a:lnTo>
+                  <a:lnTo>
+                    <a:pt x="2724760" y="261255"/>
+                  </a:lnTo>
+                  <a:lnTo>
+                    <a:pt x="2812655" y="267407"/>
+                  </a:lnTo>
+                  <a:lnTo>
+                    <a:pt x="2900551" y="273241"/>
+                  </a:lnTo>
+                  <a:lnTo>
+                    <a:pt x="2988446" y="278735"/>
+                  </a:lnTo>
+                  <a:lnTo>
+                    <a:pt x="3076342" y="283867"/>
+                  </a:lnTo>
+                  <a:lnTo>
+                    <a:pt x="3164237" y="288618"/>
+                  </a:lnTo>
+                  <a:lnTo>
+                    <a:pt x="3252133" y="292972"/>
+                  </a:lnTo>
+                  <a:lnTo>
+                    <a:pt x="3340028" y="296919"/>
+                  </a:lnTo>
+                  <a:lnTo>
+                    <a:pt x="3427924" y="300450"/>
+                  </a:lnTo>
+                  <a:lnTo>
+                    <a:pt x="3515819" y="303565"/>
+                  </a:lnTo>
+                  <a:lnTo>
+                    <a:pt x="3603715" y="306269"/>
+                  </a:lnTo>
+                  <a:lnTo>
+                    <a:pt x="3691610" y="308570"/>
+                  </a:lnTo>
+                  <a:lnTo>
+                    <a:pt x="3779506" y="310483"/>
+                  </a:lnTo>
+                  <a:lnTo>
+                    <a:pt x="3867401" y="312025"/>
+                  </a:lnTo>
+                  <a:lnTo>
+                    <a:pt x="3955297" y="313218"/>
+                  </a:lnTo>
+                  <a:lnTo>
+                    <a:pt x="4043192" y="314082"/>
+                  </a:lnTo>
+                  <a:lnTo>
+                    <a:pt x="4131088" y="314643"/>
+                  </a:lnTo>
+                  <a:lnTo>
+                    <a:pt x="4218983" y="314923"/>
+                  </a:lnTo>
+                  <a:lnTo>
+                    <a:pt x="4306879" y="314945"/>
+                  </a:lnTo>
+                  <a:lnTo>
+                    <a:pt x="4394774" y="314733"/>
+                  </a:lnTo>
+                  <a:lnTo>
+                    <a:pt x="4482670" y="314307"/>
+                  </a:lnTo>
+                  <a:lnTo>
+                    <a:pt x="4570565" y="313686"/>
+                  </a:lnTo>
+                  <a:lnTo>
+                    <a:pt x="4658461" y="312890"/>
+                  </a:lnTo>
+                  <a:lnTo>
+                    <a:pt x="4746356" y="311933"/>
+                  </a:lnTo>
+                  <a:lnTo>
+                    <a:pt x="4834252" y="310833"/>
+                  </a:lnTo>
+                  <a:lnTo>
+                    <a:pt x="4922147" y="309601"/>
+                  </a:lnTo>
+                  <a:lnTo>
+                    <a:pt x="5010043" y="308252"/>
+                  </a:lnTo>
+                  <a:lnTo>
+                    <a:pt x="5097938" y="306794"/>
+                  </a:lnTo>
+                  <a:lnTo>
+                    <a:pt x="5185834" y="305240"/>
+                  </a:lnTo>
+                  <a:lnTo>
+                    <a:pt x="5273729" y="303596"/>
+                  </a:lnTo>
+                  <a:lnTo>
+                    <a:pt x="5361625" y="301873"/>
+                  </a:lnTo>
+                  <a:lnTo>
+                    <a:pt x="5449520" y="300076"/>
+                  </a:lnTo>
+                  <a:lnTo>
+                    <a:pt x="5537416" y="298212"/>
+                  </a:lnTo>
+                  <a:lnTo>
+                    <a:pt x="5625311" y="296286"/>
+                  </a:lnTo>
+                  <a:lnTo>
+                    <a:pt x="5713207" y="294305"/>
+                  </a:lnTo>
+                  <a:lnTo>
+                    <a:pt x="5801102" y="292273"/>
+                  </a:lnTo>
+                  <a:lnTo>
+                    <a:pt x="5888998" y="290193"/>
+                  </a:lnTo>
+                  <a:lnTo>
+                    <a:pt x="5976893" y="288070"/>
+                  </a:lnTo>
+                  <a:lnTo>
+                    <a:pt x="6064789" y="285907"/>
+                  </a:lnTo>
+                  <a:lnTo>
+                    <a:pt x="6152684" y="283706"/>
+                  </a:lnTo>
+                  <a:lnTo>
+                    <a:pt x="6240580" y="281472"/>
+                  </a:lnTo>
+                  <a:lnTo>
+                    <a:pt x="6328475" y="279207"/>
+                  </a:lnTo>
+                  <a:lnTo>
+                    <a:pt x="6416371" y="276912"/>
+                  </a:lnTo>
+                  <a:lnTo>
+                    <a:pt x="6504266" y="274589"/>
+                  </a:lnTo>
+                  <a:lnTo>
+                    <a:pt x="6592162" y="272242"/>
+                  </a:lnTo>
+                  <a:lnTo>
+                    <a:pt x="6680057" y="269871"/>
+                  </a:lnTo>
+                  <a:lnTo>
+                    <a:pt x="6767953" y="267478"/>
+                  </a:lnTo>
+                  <a:lnTo>
+                    <a:pt x="6855848" y="265064"/>
+                  </a:lnTo>
+                  <a:lnTo>
+                    <a:pt x="6943744" y="262632"/>
+                  </a:lnTo>
+                  <a:lnTo>
+                    <a:pt x="6943744" y="802940"/>
+                  </a:lnTo>
+                  <a:lnTo>
+                    <a:pt x="6855848" y="793626"/>
+                  </a:lnTo>
+                  <a:lnTo>
+                    <a:pt x="6767953" y="784331"/>
+                  </a:lnTo>
+                  <a:lnTo>
+                    <a:pt x="6680057" y="775057"/>
+                  </a:lnTo>
+                  <a:lnTo>
+                    <a:pt x="6592162" y="765804"/>
+                  </a:lnTo>
+                  <a:lnTo>
+                    <a:pt x="6504266" y="756575"/>
+                  </a:lnTo>
+                  <a:lnTo>
+                    <a:pt x="6416371" y="747372"/>
+                  </a:lnTo>
+                  <a:lnTo>
+                    <a:pt x="6328475" y="738195"/>
+                  </a:lnTo>
+                  <a:lnTo>
+                    <a:pt x="6240580" y="729048"/>
+                  </a:lnTo>
+                  <a:lnTo>
+                    <a:pt x="6152684" y="719933"/>
+                  </a:lnTo>
+                  <a:lnTo>
+                    <a:pt x="6064789" y="710851"/>
+                  </a:lnTo>
+                  <a:lnTo>
+                    <a:pt x="5976893" y="701807"/>
+                  </a:lnTo>
+                  <a:lnTo>
+                    <a:pt x="5888998" y="692802"/>
+                  </a:lnTo>
+                  <a:lnTo>
+                    <a:pt x="5801102" y="683841"/>
+                  </a:lnTo>
+                  <a:lnTo>
+                    <a:pt x="5713207" y="674927"/>
+                  </a:lnTo>
+                  <a:lnTo>
+                    <a:pt x="5625311" y="666064"/>
+                  </a:lnTo>
+                  <a:lnTo>
+                    <a:pt x="5537416" y="657258"/>
+                  </a:lnTo>
+                  <a:lnTo>
+                    <a:pt x="5449520" y="648512"/>
+                  </a:lnTo>
+                  <a:lnTo>
+                    <a:pt x="5361625" y="639834"/>
+                  </a:lnTo>
+                  <a:lnTo>
+                    <a:pt x="5273729" y="631229"/>
+                  </a:lnTo>
+                  <a:lnTo>
+                    <a:pt x="5185834" y="622704"/>
+                  </a:lnTo>
+                  <a:lnTo>
+                    <a:pt x="5097938" y="614268"/>
+                  </a:lnTo>
+                  <a:lnTo>
+                    <a:pt x="5010043" y="605929"/>
+                  </a:lnTo>
+                  <a:lnTo>
+                    <a:pt x="4922147" y="597698"/>
+                  </a:lnTo>
+                  <a:lnTo>
+                    <a:pt x="4834252" y="589585"/>
+                  </a:lnTo>
+                  <a:lnTo>
+                    <a:pt x="4746356" y="581603"/>
+                  </a:lnTo>
+                  <a:lnTo>
+                    <a:pt x="4658461" y="573766"/>
+                  </a:lnTo>
+                  <a:lnTo>
+                    <a:pt x="4570565" y="566088"/>
+                  </a:lnTo>
+                  <a:lnTo>
+                    <a:pt x="4482670" y="558586"/>
+                  </a:lnTo>
+                  <a:lnTo>
+                    <a:pt x="4394774" y="551278"/>
+                  </a:lnTo>
+                  <a:lnTo>
+                    <a:pt x="4306879" y="544184"/>
+                  </a:lnTo>
+                  <a:lnTo>
+                    <a:pt x="4218983" y="537326"/>
+                  </a:lnTo>
+                  <a:lnTo>
+                    <a:pt x="4131088" y="530724"/>
+                  </a:lnTo>
+                  <a:lnTo>
+                    <a:pt x="4043192" y="524403"/>
+                  </a:lnTo>
+                  <a:lnTo>
+                    <a:pt x="3955297" y="518387"/>
+                  </a:lnTo>
+                  <a:lnTo>
+                    <a:pt x="3867401" y="512698"/>
+                  </a:lnTo>
+                  <a:lnTo>
+                    <a:pt x="3779506" y="507359"/>
+                  </a:lnTo>
+                  <a:lnTo>
+                    <a:pt x="3691610" y="502390"/>
+                  </a:lnTo>
+                  <a:lnTo>
+                    <a:pt x="3603715" y="497810"/>
+                  </a:lnTo>
+                  <a:lnTo>
+                    <a:pt x="3515819" y="493632"/>
+                  </a:lnTo>
+                  <a:lnTo>
+                    <a:pt x="3427924" y="489866"/>
+                  </a:lnTo>
+                  <a:lnTo>
+                    <a:pt x="3340028" y="486516"/>
+                  </a:lnTo>
+                  <a:lnTo>
+                    <a:pt x="3252133" y="483581"/>
+                  </a:lnTo>
+                  <a:lnTo>
+                    <a:pt x="3164237" y="481054"/>
+                  </a:lnTo>
+                  <a:lnTo>
+                    <a:pt x="3076342" y="478923"/>
+                  </a:lnTo>
+                  <a:lnTo>
+                    <a:pt x="2988446" y="477174"/>
+                  </a:lnTo>
+                  <a:lnTo>
+                    <a:pt x="2900551" y="475787"/>
+                  </a:lnTo>
+                  <a:lnTo>
+                    <a:pt x="2812655" y="474740"/>
+                  </a:lnTo>
+                  <a:lnTo>
+                    <a:pt x="2724760" y="474010"/>
+                  </a:lnTo>
+                  <a:lnTo>
+                    <a:pt x="2636864" y="473575"/>
+                  </a:lnTo>
+                  <a:lnTo>
+                    <a:pt x="2548969" y="473409"/>
+                  </a:lnTo>
+                  <a:lnTo>
+                    <a:pt x="2461073" y="473492"/>
+                  </a:lnTo>
+                  <a:lnTo>
+                    <a:pt x="2373178" y="473800"/>
+                  </a:lnTo>
+                  <a:lnTo>
+                    <a:pt x="2285282" y="474313"/>
+                  </a:lnTo>
+                  <a:lnTo>
+                    <a:pt x="2197387" y="475012"/>
+                  </a:lnTo>
+                  <a:lnTo>
+                    <a:pt x="2109491" y="475880"/>
+                  </a:lnTo>
+                  <a:lnTo>
+                    <a:pt x="2021596" y="476901"/>
+                  </a:lnTo>
+                  <a:lnTo>
+                    <a:pt x="1933700" y="478060"/>
+                  </a:lnTo>
+                  <a:lnTo>
+                    <a:pt x="1845805" y="479344"/>
+                  </a:lnTo>
+                  <a:lnTo>
+                    <a:pt x="1757909" y="480742"/>
+                  </a:lnTo>
+                  <a:lnTo>
+                    <a:pt x="1670014" y="482243"/>
+                  </a:lnTo>
+                  <a:lnTo>
+                    <a:pt x="1582118" y="483837"/>
+                  </a:lnTo>
+                  <a:lnTo>
+                    <a:pt x="1494223" y="485516"/>
+                  </a:lnTo>
+                  <a:lnTo>
+                    <a:pt x="1406327" y="487273"/>
+                  </a:lnTo>
+                  <a:lnTo>
+                    <a:pt x="1318432" y="489100"/>
+                  </a:lnTo>
+                  <a:lnTo>
+                    <a:pt x="1230536" y="490991"/>
+                  </a:lnTo>
+                  <a:lnTo>
+                    <a:pt x="1142641" y="492941"/>
+                  </a:lnTo>
+                  <a:lnTo>
+                    <a:pt x="1054745" y="494945"/>
+                  </a:lnTo>
+                  <a:lnTo>
+                    <a:pt x="966850" y="496999"/>
+                  </a:lnTo>
+                  <a:lnTo>
+                    <a:pt x="878954" y="499098"/>
+                  </a:lnTo>
+                  <a:lnTo>
+                    <a:pt x="791059" y="501239"/>
+                  </a:lnTo>
+                  <a:lnTo>
+                    <a:pt x="703163" y="503419"/>
+                  </a:lnTo>
+                  <a:lnTo>
+                    <a:pt x="615268" y="505634"/>
+                  </a:lnTo>
+                  <a:lnTo>
+                    <a:pt x="527372" y="507882"/>
+                  </a:lnTo>
+                  <a:lnTo>
+                    <a:pt x="439477" y="510161"/>
+                  </a:lnTo>
+                  <a:lnTo>
+                    <a:pt x="351581" y="512468"/>
+                  </a:lnTo>
+                  <a:lnTo>
+                    <a:pt x="263686" y="514801"/>
+                  </a:lnTo>
+                  <a:lnTo>
+                    <a:pt x="175790" y="517159"/>
+                  </a:lnTo>
+                  <a:lnTo>
+                    <a:pt x="87895" y="519540"/>
+                  </a:lnTo>
+                  <a:lnTo>
+                    <a:pt x="0" y="521942"/>
                   </a:lnTo>
                   <a:close/>
                 </a:path>
@@ -8641,258 +8606,258 @@
         </p:sp>
         <p:sp>
           <p:nvSpPr>
-            <p:cNvPr id="168" name="pl168"/>
-            <p:cNvSpPr/>
-            <p:nvPr/>
-          </p:nvSpPr>
-          <p:spPr>
-            <a:xfrm>
-              <a:off x="1326279" y="4095022"/>
-              <a:ext cx="6943744" cy="327955"/>
+            <p:cNvPr id="167" name="pl167"/>
+            <p:cNvSpPr/>
+            <p:nvPr/>
+          </p:nvSpPr>
+          <p:spPr>
+            <a:xfrm>
+              <a:off x="1326279" y="4107257"/>
+              <a:ext cx="6943744" cy="314945"/>
             </a:xfrm>
             <a:custGeom>
               <a:avLst/>
               <a:pathLst>
-                <a:path w="6943744" h="327955">
+                <a:path w="6943744" h="314945">
                   <a:moveTo>
                     <a:pt x="0" y="0"/>
                   </a:moveTo>
                   <a:lnTo>
-                    <a:pt x="87895" y="9544"/>
-                  </a:lnTo>
-                  <a:lnTo>
-                    <a:pt x="175790" y="19067"/>
-                  </a:lnTo>
-                  <a:lnTo>
-                    <a:pt x="263686" y="28567"/>
-                  </a:lnTo>
-                  <a:lnTo>
-                    <a:pt x="351581" y="38042"/>
-                  </a:lnTo>
-                  <a:lnTo>
-                    <a:pt x="439477" y="47490"/>
-                  </a:lnTo>
-                  <a:lnTo>
-                    <a:pt x="527372" y="56910"/>
-                  </a:lnTo>
-                  <a:lnTo>
-                    <a:pt x="615268" y="66298"/>
-                  </a:lnTo>
-                  <a:lnTo>
-                    <a:pt x="703163" y="75654"/>
-                  </a:lnTo>
-                  <a:lnTo>
-                    <a:pt x="791059" y="84973"/>
-                  </a:lnTo>
-                  <a:lnTo>
-                    <a:pt x="878954" y="94253"/>
-                  </a:lnTo>
-                  <a:lnTo>
-                    <a:pt x="966850" y="103491"/>
-                  </a:lnTo>
-                  <a:lnTo>
-                    <a:pt x="1054745" y="112683"/>
-                  </a:lnTo>
-                  <a:lnTo>
-                    <a:pt x="1142641" y="121825"/>
-                  </a:lnTo>
-                  <a:lnTo>
-                    <a:pt x="1230536" y="130912"/>
-                  </a:lnTo>
-                  <a:lnTo>
-                    <a:pt x="1318432" y="139940"/>
-                  </a:lnTo>
-                  <a:lnTo>
-                    <a:pt x="1406327" y="148903"/>
-                  </a:lnTo>
-                  <a:lnTo>
-                    <a:pt x="1494223" y="157794"/>
-                  </a:lnTo>
-                  <a:lnTo>
-                    <a:pt x="1582118" y="166607"/>
-                  </a:lnTo>
-                  <a:lnTo>
-                    <a:pt x="1670014" y="175334"/>
-                  </a:lnTo>
-                  <a:lnTo>
-                    <a:pt x="1757909" y="183967"/>
-                  </a:lnTo>
-                  <a:lnTo>
-                    <a:pt x="1845805" y="192495"/>
-                  </a:lnTo>
-                  <a:lnTo>
-                    <a:pt x="1933700" y="200909"/>
-                  </a:lnTo>
-                  <a:lnTo>
-                    <a:pt x="2021596" y="209197"/>
-                  </a:lnTo>
-                  <a:lnTo>
-                    <a:pt x="2109491" y="217344"/>
-                  </a:lnTo>
-                  <a:lnTo>
-                    <a:pt x="2197387" y="225338"/>
-                  </a:lnTo>
-                  <a:lnTo>
-                    <a:pt x="2285282" y="233161"/>
-                  </a:lnTo>
-                  <a:lnTo>
-                    <a:pt x="2373178" y="240797"/>
-                  </a:lnTo>
-                  <a:lnTo>
-                    <a:pt x="2461073" y="248227"/>
-                  </a:lnTo>
-                  <a:lnTo>
-                    <a:pt x="2548969" y="255429"/>
-                  </a:lnTo>
-                  <a:lnTo>
-                    <a:pt x="2636864" y="262383"/>
-                  </a:lnTo>
-                  <a:lnTo>
-                    <a:pt x="2724760" y="269067"/>
-                  </a:lnTo>
-                  <a:lnTo>
-                    <a:pt x="2812655" y="275456"/>
-                  </a:lnTo>
-                  <a:lnTo>
-                    <a:pt x="2900551" y="281528"/>
-                  </a:lnTo>
-                  <a:lnTo>
-                    <a:pt x="2988446" y="287262"/>
-                  </a:lnTo>
-                  <a:lnTo>
-                    <a:pt x="3076342" y="292635"/>
-                  </a:lnTo>
-                  <a:lnTo>
-                    <a:pt x="3164237" y="297631"/>
-                  </a:lnTo>
-                  <a:lnTo>
-                    <a:pt x="3252133" y="302235"/>
-                  </a:lnTo>
-                  <a:lnTo>
-                    <a:pt x="3340028" y="306436"/>
-                  </a:lnTo>
-                  <a:lnTo>
-                    <a:pt x="3427924" y="310228"/>
-                  </a:lnTo>
-                  <a:lnTo>
-                    <a:pt x="3515819" y="313613"/>
-                  </a:lnTo>
-                  <a:lnTo>
-                    <a:pt x="3603715" y="316594"/>
-                  </a:lnTo>
-                  <a:lnTo>
-                    <a:pt x="3691610" y="319182"/>
-                  </a:lnTo>
-                  <a:lnTo>
-                    <a:pt x="3779506" y="321391"/>
-                  </a:lnTo>
-                  <a:lnTo>
-                    <a:pt x="3867401" y="323238"/>
-                  </a:lnTo>
-                  <a:lnTo>
-                    <a:pt x="3955297" y="324745"/>
-                  </a:lnTo>
-                  <a:lnTo>
-                    <a:pt x="4043192" y="325933"/>
-                  </a:lnTo>
-                  <a:lnTo>
-                    <a:pt x="4131088" y="326825"/>
-                  </a:lnTo>
-                  <a:lnTo>
-                    <a:pt x="4218983" y="327445"/>
-                  </a:lnTo>
-                  <a:lnTo>
-                    <a:pt x="4306879" y="327814"/>
-                  </a:lnTo>
-                  <a:lnTo>
-                    <a:pt x="4394774" y="327955"/>
-                  </a:lnTo>
-                  <a:lnTo>
-                    <a:pt x="4482670" y="327888"/>
-                  </a:lnTo>
-                  <a:lnTo>
-                    <a:pt x="4570565" y="327632"/>
-                  </a:lnTo>
-                  <a:lnTo>
-                    <a:pt x="4658461" y="327204"/>
-                  </a:lnTo>
-                  <a:lnTo>
-                    <a:pt x="4746356" y="326621"/>
-                  </a:lnTo>
-                  <a:lnTo>
-                    <a:pt x="4834252" y="325897"/>
-                  </a:lnTo>
-                  <a:lnTo>
-                    <a:pt x="4922147" y="325046"/>
-                  </a:lnTo>
-                  <a:lnTo>
-                    <a:pt x="5010043" y="324079"/>
-                  </a:lnTo>
-                  <a:lnTo>
-                    <a:pt x="5097938" y="323007"/>
-                  </a:lnTo>
-                  <a:lnTo>
-                    <a:pt x="5185834" y="321840"/>
-                  </a:lnTo>
-                  <a:lnTo>
-                    <a:pt x="5273729" y="320587"/>
-                  </a:lnTo>
-                  <a:lnTo>
-                    <a:pt x="5361625" y="319254"/>
-                  </a:lnTo>
-                  <a:lnTo>
-                    <a:pt x="5449520" y="317850"/>
-                  </a:lnTo>
-                  <a:lnTo>
-                    <a:pt x="5537416" y="316380"/>
-                  </a:lnTo>
-                  <a:lnTo>
-                    <a:pt x="5625311" y="314850"/>
-                  </a:lnTo>
-                  <a:lnTo>
-                    <a:pt x="5713207" y="313266"/>
-                  </a:lnTo>
-                  <a:lnTo>
-                    <a:pt x="5801102" y="311630"/>
-                  </a:lnTo>
-                  <a:lnTo>
-                    <a:pt x="5888998" y="309949"/>
-                  </a:lnTo>
-                  <a:lnTo>
-                    <a:pt x="5976893" y="308225"/>
-                  </a:lnTo>
-                  <a:lnTo>
-                    <a:pt x="6064789" y="306461"/>
-                  </a:lnTo>
-                  <a:lnTo>
-                    <a:pt x="6152684" y="304662"/>
-                  </a:lnTo>
-                  <a:lnTo>
-                    <a:pt x="6240580" y="302828"/>
-                  </a:lnTo>
-                  <a:lnTo>
-                    <a:pt x="6328475" y="300964"/>
-                  </a:lnTo>
-                  <a:lnTo>
-                    <a:pt x="6416371" y="299071"/>
-                  </a:lnTo>
-                  <a:lnTo>
-                    <a:pt x="6504266" y="297151"/>
-                  </a:lnTo>
-                  <a:lnTo>
-                    <a:pt x="6592162" y="295206"/>
-                  </a:lnTo>
-                  <a:lnTo>
-                    <a:pt x="6680057" y="293238"/>
-                  </a:lnTo>
-                  <a:lnTo>
-                    <a:pt x="6767953" y="291248"/>
-                  </a:lnTo>
-                  <a:lnTo>
-                    <a:pt x="6855848" y="289238"/>
-                  </a:lnTo>
-                  <a:lnTo>
-                    <a:pt x="6943744" y="287209"/>
+                    <a:pt x="87895" y="9283"/>
+                  </a:lnTo>
+                  <a:lnTo>
+                    <a:pt x="175790" y="18545"/>
+                  </a:lnTo>
+                  <a:lnTo>
+                    <a:pt x="263686" y="27785"/>
+                  </a:lnTo>
+                  <a:lnTo>
+                    <a:pt x="351581" y="36999"/>
+                  </a:lnTo>
+                  <a:lnTo>
+                    <a:pt x="439477" y="46188"/>
+                  </a:lnTo>
+                  <a:lnTo>
+                    <a:pt x="527372" y="55348"/>
+                  </a:lnTo>
+                  <a:lnTo>
+                    <a:pt x="615268" y="64478"/>
+                  </a:lnTo>
+                  <a:lnTo>
+                    <a:pt x="703163" y="73574"/>
+                  </a:lnTo>
+                  <a:lnTo>
+                    <a:pt x="791059" y="82635"/>
+                  </a:lnTo>
+                  <a:lnTo>
+                    <a:pt x="878954" y="91658"/>
+                  </a:lnTo>
+                  <a:lnTo>
+                    <a:pt x="966850" y="100638"/>
+                  </a:lnTo>
+                  <a:lnTo>
+                    <a:pt x="1054745" y="109573"/>
+                  </a:lnTo>
+                  <a:lnTo>
+                    <a:pt x="1142641" y="118459"/>
+                  </a:lnTo>
+                  <a:lnTo>
+                    <a:pt x="1230536" y="127290"/>
+                  </a:lnTo>
+                  <a:lnTo>
+                    <a:pt x="1318432" y="136063"/>
+                  </a:lnTo>
+                  <a:lnTo>
+                    <a:pt x="1406327" y="144771"/>
+                  </a:lnTo>
+                  <a:lnTo>
+                    <a:pt x="1494223" y="153409"/>
+                  </a:lnTo>
+                  <a:lnTo>
+                    <a:pt x="1582118" y="161970"/>
+                  </a:lnTo>
+                  <a:lnTo>
+                    <a:pt x="1670014" y="170445"/>
+                  </a:lnTo>
+                  <a:lnTo>
+                    <a:pt x="1757909" y="178827"/>
+                  </a:lnTo>
+                  <a:lnTo>
+                    <a:pt x="1845805" y="187107"/>
+                  </a:lnTo>
+                  <a:lnTo>
+                    <a:pt x="1933700" y="195272"/>
+                  </a:lnTo>
+                  <a:lnTo>
+                    <a:pt x="2021596" y="203313"/>
+                  </a:lnTo>
+                  <a:lnTo>
+                    <a:pt x="2109491" y="211215"/>
+                  </a:lnTo>
+                  <a:lnTo>
+                    <a:pt x="2197387" y="218964"/>
+                  </a:lnTo>
+                  <a:lnTo>
+                    <a:pt x="2285282" y="226545"/>
+                  </a:lnTo>
+                  <a:lnTo>
+                    <a:pt x="2373178" y="233940"/>
+                  </a:lnTo>
+                  <a:lnTo>
+                    <a:pt x="2461073" y="241129"/>
+                  </a:lnTo>
+                  <a:lnTo>
+                    <a:pt x="2548969" y="248093"/>
+                  </a:lnTo>
+                  <a:lnTo>
+                    <a:pt x="2636864" y="254809"/>
+                  </a:lnTo>
+                  <a:lnTo>
+                    <a:pt x="2724760" y="261255"/>
+                  </a:lnTo>
+                  <a:lnTo>
+                    <a:pt x="2812655" y="267407"/>
+                  </a:lnTo>
+                  <a:lnTo>
+                    <a:pt x="2900551" y="273241"/>
+                  </a:lnTo>
+                  <a:lnTo>
+                    <a:pt x="2988446" y="278735"/>
+                  </a:lnTo>
+                  <a:lnTo>
+                    <a:pt x="3076342" y="283867"/>
+                  </a:lnTo>
+                  <a:lnTo>
+                    <a:pt x="3164237" y="288618"/>
+                  </a:lnTo>
+                  <a:lnTo>
+                    <a:pt x="3252133" y="292972"/>
+                  </a:lnTo>
+                  <a:lnTo>
+                    <a:pt x="3340028" y="296919"/>
+                  </a:lnTo>
+                  <a:lnTo>
+                    <a:pt x="3427924" y="300450"/>
+                  </a:lnTo>
+                  <a:lnTo>
+                    <a:pt x="3515819" y="303565"/>
+                  </a:lnTo>
+                  <a:lnTo>
+                    <a:pt x="3603715" y="306269"/>
+                  </a:lnTo>
+                  <a:lnTo>
+                    <a:pt x="3691610" y="308570"/>
+                  </a:lnTo>
+                  <a:lnTo>
+                    <a:pt x="3779506" y="310483"/>
+                  </a:lnTo>
+                  <a:lnTo>
+                    <a:pt x="3867401" y="312025"/>
+                  </a:lnTo>
+                  <a:lnTo>
+                    <a:pt x="3955297" y="313218"/>
+                  </a:lnTo>
+                  <a:lnTo>
+                    <a:pt x="4043192" y="314082"/>
+                  </a:lnTo>
+                  <a:lnTo>
+                    <a:pt x="4131088" y="314643"/>
+                  </a:lnTo>
+                  <a:lnTo>
+                    <a:pt x="4218983" y="314923"/>
+                  </a:lnTo>
+                  <a:lnTo>
+                    <a:pt x="4306879" y="314945"/>
+                  </a:lnTo>
+                  <a:lnTo>
+                    <a:pt x="4394774" y="314733"/>
+                  </a:lnTo>
+                  <a:lnTo>
+                    <a:pt x="4482670" y="314307"/>
+                  </a:lnTo>
+                  <a:lnTo>
+                    <a:pt x="4570565" y="313686"/>
+                  </a:lnTo>
+                  <a:lnTo>
+                    <a:pt x="4658461" y="312890"/>
+                  </a:lnTo>
+                  <a:lnTo>
+                    <a:pt x="4746356" y="311933"/>
+                  </a:lnTo>
+                  <a:lnTo>
+                    <a:pt x="4834252" y="310833"/>
+                  </a:lnTo>
+                  <a:lnTo>
+                    <a:pt x="4922147" y="309601"/>
+                  </a:lnTo>
+                  <a:lnTo>
+                    <a:pt x="5010043" y="308252"/>
+                  </a:lnTo>
+                  <a:lnTo>
+                    <a:pt x="5097938" y="306794"/>
+                  </a:lnTo>
+                  <a:lnTo>
+                    <a:pt x="5185834" y="305240"/>
+                  </a:lnTo>
+                  <a:lnTo>
+                    <a:pt x="5273729" y="303596"/>
+                  </a:lnTo>
+                  <a:lnTo>
+                    <a:pt x="5361625" y="301873"/>
+                  </a:lnTo>
+                  <a:lnTo>
+                    <a:pt x="5449520" y="300076"/>
+                  </a:lnTo>
+                  <a:lnTo>
+                    <a:pt x="5537416" y="298212"/>
+                  </a:lnTo>
+                  <a:lnTo>
+                    <a:pt x="5625311" y="296286"/>
+                  </a:lnTo>
+                  <a:lnTo>
+                    <a:pt x="5713207" y="294305"/>
+                  </a:lnTo>
+                  <a:lnTo>
+                    <a:pt x="5801102" y="292273"/>
+                  </a:lnTo>
+                  <a:lnTo>
+                    <a:pt x="5888998" y="290193"/>
+                  </a:lnTo>
+                  <a:lnTo>
+                    <a:pt x="5976893" y="288070"/>
+                  </a:lnTo>
+                  <a:lnTo>
+                    <a:pt x="6064789" y="285907"/>
+                  </a:lnTo>
+                  <a:lnTo>
+                    <a:pt x="6152684" y="283706"/>
+                  </a:lnTo>
+                  <a:lnTo>
+                    <a:pt x="6240580" y="281472"/>
+                  </a:lnTo>
+                  <a:lnTo>
+                    <a:pt x="6328475" y="279207"/>
+                  </a:lnTo>
+                  <a:lnTo>
+                    <a:pt x="6416371" y="276912"/>
+                  </a:lnTo>
+                  <a:lnTo>
+                    <a:pt x="6504266" y="274589"/>
+                  </a:lnTo>
+                  <a:lnTo>
+                    <a:pt x="6592162" y="272242"/>
+                  </a:lnTo>
+                  <a:lnTo>
+                    <a:pt x="6680057" y="269871"/>
+                  </a:lnTo>
+                  <a:lnTo>
+                    <a:pt x="6767953" y="267478"/>
+                  </a:lnTo>
+                  <a:lnTo>
+                    <a:pt x="6855848" y="265064"/>
+                  </a:lnTo>
+                  <a:lnTo>
+                    <a:pt x="6943744" y="262632"/>
                   </a:lnTo>
                 </a:path>
               </a:pathLst>
@@ -8906,258 +8871,258 @@
         </p:sp>
         <p:sp>
           <p:nvSpPr>
-            <p:cNvPr id="169" name="pl169"/>
-            <p:cNvSpPr/>
-            <p:nvPr/>
-          </p:nvSpPr>
-          <p:spPr>
-            <a:xfrm>
-              <a:off x="1326279" y="4572556"/>
-              <a:ext cx="6943744" cy="346339"/>
+            <p:cNvPr id="168" name="pl168"/>
+            <p:cNvSpPr/>
+            <p:nvPr/>
+          </p:nvSpPr>
+          <p:spPr>
+            <a:xfrm>
+              <a:off x="1326279" y="4580667"/>
+              <a:ext cx="6943744" cy="329530"/>
             </a:xfrm>
             <a:custGeom>
               <a:avLst/>
               <a:pathLst>
-                <a:path w="6943744" h="346339">
+                <a:path w="6943744" h="329530">
                   <a:moveTo>
-                    <a:pt x="6943744" y="346339"/>
+                    <a:pt x="6943744" y="329530"/>
                   </a:moveTo>
                   <a:lnTo>
-                    <a:pt x="6855848" y="336757"/>
-                  </a:lnTo>
-                  <a:lnTo>
-                    <a:pt x="6767953" y="327194"/>
-                  </a:lnTo>
-                  <a:lnTo>
-                    <a:pt x="6680057" y="317652"/>
-                  </a:lnTo>
-                  <a:lnTo>
-                    <a:pt x="6592162" y="308130"/>
-                  </a:lnTo>
-                  <a:lnTo>
-                    <a:pt x="6504266" y="298633"/>
-                  </a:lnTo>
-                  <a:lnTo>
-                    <a:pt x="6416371" y="289160"/>
-                  </a:lnTo>
-                  <a:lnTo>
-                    <a:pt x="6328475" y="279714"/>
-                  </a:lnTo>
-                  <a:lnTo>
-                    <a:pt x="6240580" y="270296"/>
-                  </a:lnTo>
-                  <a:lnTo>
-                    <a:pt x="6152684" y="260910"/>
-                  </a:lnTo>
-                  <a:lnTo>
-                    <a:pt x="6064789" y="251557"/>
-                  </a:lnTo>
-                  <a:lnTo>
-                    <a:pt x="5976893" y="242241"/>
-                  </a:lnTo>
-                  <a:lnTo>
-                    <a:pt x="5888998" y="232964"/>
-                  </a:lnTo>
-                  <a:lnTo>
-                    <a:pt x="5801102" y="223730"/>
-                  </a:lnTo>
-                  <a:lnTo>
-                    <a:pt x="5713207" y="214542"/>
-                  </a:lnTo>
-                  <a:lnTo>
-                    <a:pt x="5625311" y="205404"/>
-                  </a:lnTo>
-                  <a:lnTo>
-                    <a:pt x="5537416" y="196321"/>
-                  </a:lnTo>
-                  <a:lnTo>
-                    <a:pt x="5449520" y="187298"/>
-                  </a:lnTo>
-                  <a:lnTo>
-                    <a:pt x="5361625" y="178341"/>
-                  </a:lnTo>
-                  <a:lnTo>
-                    <a:pt x="5273729" y="169456"/>
-                  </a:lnTo>
-                  <a:lnTo>
-                    <a:pt x="5185834" y="160650"/>
-                  </a:lnTo>
-                  <a:lnTo>
-                    <a:pt x="5097938" y="151930"/>
-                  </a:lnTo>
-                  <a:lnTo>
-                    <a:pt x="5010043" y="143305"/>
-                  </a:lnTo>
-                  <a:lnTo>
-                    <a:pt x="4922147" y="134785"/>
-                  </a:lnTo>
-                  <a:lnTo>
-                    <a:pt x="4834252" y="126381"/>
-                  </a:lnTo>
-                  <a:lnTo>
-                    <a:pt x="4746356" y="118104"/>
-                  </a:lnTo>
-                  <a:lnTo>
-                    <a:pt x="4658461" y="109968"/>
-                  </a:lnTo>
-                  <a:lnTo>
-                    <a:pt x="4570565" y="101988"/>
-                  </a:lnTo>
-                  <a:lnTo>
-                    <a:pt x="4482670" y="94179"/>
-                  </a:lnTo>
-                  <a:lnTo>
-                    <a:pt x="4394774" y="86558"/>
-                  </a:lnTo>
-                  <a:lnTo>
-                    <a:pt x="4306879" y="79146"/>
-                  </a:lnTo>
-                  <a:lnTo>
-                    <a:pt x="4218983" y="71963"/>
-                  </a:lnTo>
-                  <a:lnTo>
-                    <a:pt x="4131088" y="65029"/>
-                  </a:lnTo>
-                  <a:lnTo>
-                    <a:pt x="4043192" y="58369"/>
-                  </a:lnTo>
-                  <a:lnTo>
-                    <a:pt x="3955297" y="52004"/>
-                  </a:lnTo>
-                  <a:lnTo>
-                    <a:pt x="3867401" y="45958"/>
-                  </a:lnTo>
-                  <a:lnTo>
-                    <a:pt x="3779506" y="40253"/>
-                  </a:lnTo>
-                  <a:lnTo>
-                    <a:pt x="3691610" y="34908"/>
-                  </a:lnTo>
-                  <a:lnTo>
-                    <a:pt x="3603715" y="29943"/>
-                  </a:lnTo>
-                  <a:lnTo>
-                    <a:pt x="3515819" y="25372"/>
-                  </a:lnTo>
-                  <a:lnTo>
-                    <a:pt x="3427924" y="21203"/>
-                  </a:lnTo>
-                  <a:lnTo>
-                    <a:pt x="3340028" y="17443"/>
-                  </a:lnTo>
-                  <a:lnTo>
-                    <a:pt x="3252133" y="14091"/>
-                  </a:lnTo>
-                  <a:lnTo>
-                    <a:pt x="3164237" y="11142"/>
-                  </a:lnTo>
-                  <a:lnTo>
-                    <a:pt x="3076342" y="8585"/>
-                  </a:lnTo>
-                  <a:lnTo>
-                    <a:pt x="2988446" y="6405"/>
-                  </a:lnTo>
-                  <a:lnTo>
-                    <a:pt x="2900551" y="4586"/>
-                  </a:lnTo>
-                  <a:lnTo>
-                    <a:pt x="2812655" y="3105"/>
-                  </a:lnTo>
-                  <a:lnTo>
-                    <a:pt x="2724760" y="1942"/>
-                  </a:lnTo>
-                  <a:lnTo>
-                    <a:pt x="2636864" y="1072"/>
-                  </a:lnTo>
-                  <a:lnTo>
-                    <a:pt x="2548969" y="473"/>
-                  </a:lnTo>
-                  <a:lnTo>
-                    <a:pt x="2461073" y="123"/>
-                  </a:lnTo>
-                  <a:lnTo>
-                    <a:pt x="2373178" y="0"/>
-                  </a:lnTo>
-                  <a:lnTo>
-                    <a:pt x="2285282" y="82"/>
-                  </a:lnTo>
-                  <a:lnTo>
-                    <a:pt x="2197387" y="353"/>
-                  </a:lnTo>
-                  <a:lnTo>
-                    <a:pt x="2109491" y="794"/>
-                  </a:lnTo>
-                  <a:lnTo>
-                    <a:pt x="2021596" y="1388"/>
-                  </a:lnTo>
-                  <a:lnTo>
-                    <a:pt x="1933700" y="2123"/>
-                  </a:lnTo>
-                  <a:lnTo>
-                    <a:pt x="1845805" y="2984"/>
-                  </a:lnTo>
-                  <a:lnTo>
-                    <a:pt x="1757909" y="3960"/>
-                  </a:lnTo>
-                  <a:lnTo>
-                    <a:pt x="1670014" y="5039"/>
-                  </a:lnTo>
-                  <a:lnTo>
-                    <a:pt x="1582118" y="6214"/>
-                  </a:lnTo>
-                  <a:lnTo>
-                    <a:pt x="1494223" y="7474"/>
-                  </a:lnTo>
-                  <a:lnTo>
-                    <a:pt x="1406327" y="8812"/>
-                  </a:lnTo>
-                  <a:lnTo>
-                    <a:pt x="1318432" y="10222"/>
-                  </a:lnTo>
-                  <a:lnTo>
-                    <a:pt x="1230536" y="11697"/>
-                  </a:lnTo>
-                  <a:lnTo>
-                    <a:pt x="1142641" y="13231"/>
-                  </a:lnTo>
-                  <a:lnTo>
-                    <a:pt x="1054745" y="14820"/>
-                  </a:lnTo>
-                  <a:lnTo>
-                    <a:pt x="966850" y="16459"/>
-                  </a:lnTo>
-                  <a:lnTo>
-                    <a:pt x="878954" y="18144"/>
-                  </a:lnTo>
-                  <a:lnTo>
-                    <a:pt x="791059" y="19871"/>
-                  </a:lnTo>
-                  <a:lnTo>
-                    <a:pt x="703163" y="21638"/>
-                  </a:lnTo>
-                  <a:lnTo>
-                    <a:pt x="615268" y="23440"/>
-                  </a:lnTo>
-                  <a:lnTo>
-                    <a:pt x="527372" y="25276"/>
-                  </a:lnTo>
-                  <a:lnTo>
-                    <a:pt x="439477" y="27143"/>
-                  </a:lnTo>
-                  <a:lnTo>
-                    <a:pt x="351581" y="29038"/>
-                  </a:lnTo>
-                  <a:lnTo>
-                    <a:pt x="263686" y="30960"/>
-                  </a:lnTo>
-                  <a:lnTo>
-                    <a:pt x="175790" y="32907"/>
-                  </a:lnTo>
-                  <a:lnTo>
-                    <a:pt x="87895" y="34877"/>
-                  </a:lnTo>
-                  <a:lnTo>
-                    <a:pt x="0" y="36869"/>
+                    <a:pt x="6855848" y="320216"/>
+                  </a:lnTo>
+                  <a:lnTo>
+                    <a:pt x="6767953" y="310921"/>
+                  </a:lnTo>
+                  <a:lnTo>
+                    <a:pt x="6680057" y="301647"/>
+                  </a:lnTo>
+                  <a:lnTo>
+                    <a:pt x="6592162" y="292394"/>
+                  </a:lnTo>
+                  <a:lnTo>
+                    <a:pt x="6504266" y="283165"/>
+                  </a:lnTo>
+                  <a:lnTo>
+                    <a:pt x="6416371" y="273962"/>
+                  </a:lnTo>
+                  <a:lnTo>
+                    <a:pt x="6328475" y="264785"/>
+                  </a:lnTo>
+                  <a:lnTo>
+                    <a:pt x="6240580" y="255638"/>
+                  </a:lnTo>
+                  <a:lnTo>
+                    <a:pt x="6152684" y="246523"/>
+                  </a:lnTo>
+                  <a:lnTo>
+                    <a:pt x="6064789" y="237441"/>
+                  </a:lnTo>
+                  <a:lnTo>
+                    <a:pt x="5976893" y="228397"/>
+                  </a:lnTo>
+                  <a:lnTo>
+                    <a:pt x="5888998" y="219392"/>
+                  </a:lnTo>
+                  <a:lnTo>
+                    <a:pt x="5801102" y="210431"/>
+                  </a:lnTo>
+                  <a:lnTo>
+                    <a:pt x="5713207" y="201517"/>
+                  </a:lnTo>
+                  <a:lnTo>
+                    <a:pt x="5625311" y="192654"/>
+                  </a:lnTo>
+                  <a:lnTo>
+                    <a:pt x="5537416" y="183848"/>
+                  </a:lnTo>
+                  <a:lnTo>
+                    <a:pt x="5449520" y="175102"/>
+                  </a:lnTo>
+                  <a:lnTo>
+                    <a:pt x="5361625" y="166424"/>
+                  </a:lnTo>
+                  <a:lnTo>
+                    <a:pt x="5273729" y="157819"/>
+                  </a:lnTo>
+                  <a:lnTo>
+                    <a:pt x="5185834" y="149294"/>
+                  </a:lnTo>
+                  <a:lnTo>
+                    <a:pt x="5097938" y="140858"/>
+                  </a:lnTo>
+                  <a:lnTo>
+                    <a:pt x="5010043" y="132520"/>
+                  </a:lnTo>
+                  <a:lnTo>
+                    <a:pt x="4922147" y="124288"/>
+                  </a:lnTo>
+                  <a:lnTo>
+                    <a:pt x="4834252" y="116176"/>
+                  </a:lnTo>
+                  <a:lnTo>
+                    <a:pt x="4746356" y="108194"/>
+                  </a:lnTo>
+                  <a:lnTo>
+                    <a:pt x="4658461" y="100356"/>
+                  </a:lnTo>
+                  <a:lnTo>
+                    <a:pt x="4570565" y="92678"/>
+                  </a:lnTo>
+                  <a:lnTo>
+                    <a:pt x="4482670" y="85176"/>
+                  </a:lnTo>
+                  <a:lnTo>
+                    <a:pt x="4394774" y="77868"/>
+                  </a:lnTo>
+                  <a:lnTo>
+                    <a:pt x="4306879" y="70775"/>
+                  </a:lnTo>
+                  <a:lnTo>
+                    <a:pt x="4218983" y="63916"/>
+                  </a:lnTo>
+                  <a:lnTo>
+                    <a:pt x="4131088" y="57314"/>
+                  </a:lnTo>
+                  <a:lnTo>
+                    <a:pt x="4043192" y="50994"/>
+                  </a:lnTo>
+                  <a:lnTo>
+                    <a:pt x="3955297" y="44977"/>
+                  </a:lnTo>
+                  <a:lnTo>
+                    <a:pt x="3867401" y="39288"/>
+                  </a:lnTo>
+                  <a:lnTo>
+                    <a:pt x="3779506" y="33949"/>
+                  </a:lnTo>
+                  <a:lnTo>
+                    <a:pt x="3691610" y="28980"/>
+                  </a:lnTo>
+                  <a:lnTo>
+                    <a:pt x="3603715" y="24400"/>
+                  </a:lnTo>
+                  <a:lnTo>
+                    <a:pt x="3515819" y="20222"/>
+                  </a:lnTo>
+                  <a:lnTo>
+                    <a:pt x="3427924" y="16456"/>
+                  </a:lnTo>
+                  <a:lnTo>
+                    <a:pt x="3340028" y="13106"/>
+                  </a:lnTo>
+                  <a:lnTo>
+                    <a:pt x="3252133" y="10171"/>
+                  </a:lnTo>
+                  <a:lnTo>
+                    <a:pt x="3164237" y="7644"/>
+                  </a:lnTo>
+                  <a:lnTo>
+                    <a:pt x="3076342" y="5513"/>
+                  </a:lnTo>
+                  <a:lnTo>
+                    <a:pt x="2988446" y="3764"/>
+                  </a:lnTo>
+                  <a:lnTo>
+                    <a:pt x="2900551" y="2377"/>
+                  </a:lnTo>
+                  <a:lnTo>
+                    <a:pt x="2812655" y="1330"/>
+                  </a:lnTo>
+                  <a:lnTo>
+                    <a:pt x="2724760" y="600"/>
+                  </a:lnTo>
+                  <a:lnTo>
+                    <a:pt x="2636864" y="165"/>
+                  </a:lnTo>
+                  <a:lnTo>
+                    <a:pt x="2548969" y="0"/>
+                  </a:lnTo>
+                  <a:lnTo>
+                    <a:pt x="2461073" y="82"/>
+                  </a:lnTo>
+                  <a:lnTo>
+                    <a:pt x="2373178" y="390"/>
+                  </a:lnTo>
+                  <a:lnTo>
+                    <a:pt x="2285282" y="903"/>
+                  </a:lnTo>
+                  <a:lnTo>
+                    <a:pt x="2197387" y="1602"/>
+                  </a:lnTo>
+                  <a:lnTo>
+                    <a:pt x="2109491" y="2470"/>
+                  </a:lnTo>
+                  <a:lnTo>
+                    <a:pt x="2021596" y="3491"/>
+                  </a:lnTo>
+                  <a:lnTo>
+                    <a:pt x="1933700" y="4650"/>
+                  </a:lnTo>
+                  <a:lnTo>
+                    <a:pt x="1845805" y="5934"/>
+                  </a:lnTo>
+                  <a:lnTo>
+                    <a:pt x="1757909" y="7332"/>
+                  </a:lnTo>
+                  <a:lnTo>
+                    <a:pt x="1670014" y="8833"/>
+                  </a:lnTo>
+                  <a:lnTo>
+                    <a:pt x="1582118" y="10427"/>
+                  </a:lnTo>
+                  <a:lnTo>
+                    <a:pt x="1494223" y="12106"/>
+                  </a:lnTo>
+                  <a:lnTo>
+                    <a:pt x="1406327" y="13863"/>
+                  </a:lnTo>
+                  <a:lnTo>
+                    <a:pt x="1318432" y="15690"/>
+                  </a:lnTo>
+                  <a:lnTo>
+                    <a:pt x="1230536" y="17581"/>
+                  </a:lnTo>
+                  <a:lnTo>
+                    <a:pt x="1142641" y="19531"/>
+                  </a:lnTo>
+                  <a:lnTo>
+                    <a:pt x="1054745" y="21535"/>
+                  </a:lnTo>
+                  <a:lnTo>
+                    <a:pt x="966850" y="23589"/>
+                  </a:lnTo>
+                  <a:lnTo>
+                    <a:pt x="878954" y="25688"/>
+                  </a:lnTo>
+                  <a:lnTo>
+                    <a:pt x="791059" y="27829"/>
+                  </a:lnTo>
+                  <a:lnTo>
+                    <a:pt x="703163" y="30009"/>
+                  </a:lnTo>
+                  <a:lnTo>
+                    <a:pt x="615268" y="32224"/>
+                  </a:lnTo>
+                  <a:lnTo>
+                    <a:pt x="527372" y="34472"/>
+                  </a:lnTo>
+                  <a:lnTo>
+                    <a:pt x="439477" y="36751"/>
+                  </a:lnTo>
+                  <a:lnTo>
+                    <a:pt x="351581" y="39058"/>
+                  </a:lnTo>
+                  <a:lnTo>
+                    <a:pt x="263686" y="41391"/>
+                  </a:lnTo>
+                  <a:lnTo>
+                    <a:pt x="175790" y="43749"/>
+                  </a:lnTo>
+                  <a:lnTo>
+                    <a:pt x="87895" y="46130"/>
+                  </a:lnTo>
+                  <a:lnTo>
+                    <a:pt x="0" y="48532"/>
                   </a:lnTo>
                 </a:path>
               </a:pathLst>
@@ -9171,258 +9136,258 @@
         </p:sp>
         <p:sp>
           <p:nvSpPr>
-            <p:cNvPr id="170" name="pl170"/>
-            <p:cNvSpPr/>
-            <p:nvPr/>
-          </p:nvSpPr>
-          <p:spPr>
-            <a:xfrm>
-              <a:off x="1326279" y="4352224"/>
-              <a:ext cx="6943744" cy="298339"/>
+            <p:cNvPr id="169" name="pl169"/>
+            <p:cNvSpPr/>
+            <p:nvPr/>
+          </p:nvSpPr>
+          <p:spPr>
+            <a:xfrm>
+              <a:off x="1326279" y="4368228"/>
+              <a:ext cx="6943744" cy="271814"/>
             </a:xfrm>
             <a:custGeom>
               <a:avLst/>
               <a:pathLst>
-                <a:path w="6943744" h="298339">
+                <a:path w="6943744" h="271814">
                   <a:moveTo>
                     <a:pt x="0" y="0"/>
                   </a:moveTo>
                   <a:lnTo>
-                    <a:pt x="87895" y="3776"/>
-                  </a:lnTo>
-                  <a:lnTo>
-                    <a:pt x="175790" y="7552"/>
-                  </a:lnTo>
-                  <a:lnTo>
-                    <a:pt x="263686" y="11329"/>
-                  </a:lnTo>
-                  <a:lnTo>
-                    <a:pt x="351581" y="15105"/>
-                  </a:lnTo>
-                  <a:lnTo>
-                    <a:pt x="439477" y="18882"/>
-                  </a:lnTo>
-                  <a:lnTo>
-                    <a:pt x="527372" y="22658"/>
-                  </a:lnTo>
-                  <a:lnTo>
-                    <a:pt x="615268" y="26435"/>
-                  </a:lnTo>
-                  <a:lnTo>
-                    <a:pt x="703163" y="30211"/>
-                  </a:lnTo>
-                  <a:lnTo>
-                    <a:pt x="791059" y="33988"/>
-                  </a:lnTo>
-                  <a:lnTo>
-                    <a:pt x="878954" y="37764"/>
-                  </a:lnTo>
-                  <a:lnTo>
-                    <a:pt x="966850" y="41541"/>
-                  </a:lnTo>
-                  <a:lnTo>
-                    <a:pt x="1054745" y="45317"/>
-                  </a:lnTo>
-                  <a:lnTo>
-                    <a:pt x="1142641" y="49093"/>
-                  </a:lnTo>
-                  <a:lnTo>
-                    <a:pt x="1230536" y="52870"/>
-                  </a:lnTo>
-                  <a:lnTo>
-                    <a:pt x="1318432" y="56646"/>
-                  </a:lnTo>
-                  <a:lnTo>
-                    <a:pt x="1406327" y="60423"/>
-                  </a:lnTo>
-                  <a:lnTo>
-                    <a:pt x="1494223" y="64199"/>
-                  </a:lnTo>
-                  <a:lnTo>
-                    <a:pt x="1582118" y="67976"/>
-                  </a:lnTo>
-                  <a:lnTo>
-                    <a:pt x="1670014" y="71752"/>
-                  </a:lnTo>
-                  <a:lnTo>
-                    <a:pt x="1757909" y="75529"/>
-                  </a:lnTo>
-                  <a:lnTo>
-                    <a:pt x="1845805" y="79305"/>
-                  </a:lnTo>
-                  <a:lnTo>
-                    <a:pt x="1933700" y="83082"/>
-                  </a:lnTo>
-                  <a:lnTo>
-                    <a:pt x="2021596" y="86858"/>
-                  </a:lnTo>
-                  <a:lnTo>
-                    <a:pt x="2109491" y="90634"/>
-                  </a:lnTo>
-                  <a:lnTo>
-                    <a:pt x="2197387" y="94411"/>
-                  </a:lnTo>
-                  <a:lnTo>
-                    <a:pt x="2285282" y="98187"/>
-                  </a:lnTo>
-                  <a:lnTo>
-                    <a:pt x="2373178" y="101964"/>
-                  </a:lnTo>
-                  <a:lnTo>
-                    <a:pt x="2461073" y="105740"/>
-                  </a:lnTo>
-                  <a:lnTo>
-                    <a:pt x="2548969" y="109517"/>
-                  </a:lnTo>
-                  <a:lnTo>
-                    <a:pt x="2636864" y="113293"/>
-                  </a:lnTo>
-                  <a:lnTo>
-                    <a:pt x="2724760" y="117070"/>
-                  </a:lnTo>
-                  <a:lnTo>
-                    <a:pt x="2812655" y="120846"/>
-                  </a:lnTo>
-                  <a:lnTo>
-                    <a:pt x="2900551" y="124623"/>
-                  </a:lnTo>
-                  <a:lnTo>
-                    <a:pt x="2988446" y="128399"/>
-                  </a:lnTo>
-                  <a:lnTo>
-                    <a:pt x="3076342" y="132175"/>
-                  </a:lnTo>
-                  <a:lnTo>
-                    <a:pt x="3164237" y="135952"/>
-                  </a:lnTo>
-                  <a:lnTo>
-                    <a:pt x="3252133" y="139728"/>
-                  </a:lnTo>
-                  <a:lnTo>
-                    <a:pt x="3340028" y="143505"/>
-                  </a:lnTo>
-                  <a:lnTo>
-                    <a:pt x="3427924" y="147281"/>
-                  </a:lnTo>
-                  <a:lnTo>
-                    <a:pt x="3515819" y="151058"/>
-                  </a:lnTo>
-                  <a:lnTo>
-                    <a:pt x="3603715" y="154834"/>
-                  </a:lnTo>
-                  <a:lnTo>
-                    <a:pt x="3691610" y="158611"/>
-                  </a:lnTo>
-                  <a:lnTo>
-                    <a:pt x="3779506" y="162387"/>
-                  </a:lnTo>
-                  <a:lnTo>
-                    <a:pt x="3867401" y="166164"/>
-                  </a:lnTo>
-                  <a:lnTo>
-                    <a:pt x="3955297" y="169940"/>
-                  </a:lnTo>
-                  <a:lnTo>
-                    <a:pt x="4043192" y="173716"/>
-                  </a:lnTo>
-                  <a:lnTo>
-                    <a:pt x="4131088" y="177493"/>
-                  </a:lnTo>
-                  <a:lnTo>
-                    <a:pt x="4218983" y="181269"/>
-                  </a:lnTo>
-                  <a:lnTo>
-                    <a:pt x="4306879" y="185046"/>
-                  </a:lnTo>
-                  <a:lnTo>
-                    <a:pt x="4394774" y="188822"/>
-                  </a:lnTo>
-                  <a:lnTo>
-                    <a:pt x="4482670" y="192599"/>
-                  </a:lnTo>
-                  <a:lnTo>
-                    <a:pt x="4570565" y="196375"/>
-                  </a:lnTo>
-                  <a:lnTo>
-                    <a:pt x="4658461" y="200152"/>
-                  </a:lnTo>
-                  <a:lnTo>
-                    <a:pt x="4746356" y="203928"/>
-                  </a:lnTo>
-                  <a:lnTo>
-                    <a:pt x="4834252" y="207705"/>
-                  </a:lnTo>
-                  <a:lnTo>
-                    <a:pt x="4922147" y="211481"/>
-                  </a:lnTo>
-                  <a:lnTo>
-                    <a:pt x="5010043" y="215257"/>
-                  </a:lnTo>
-                  <a:lnTo>
-                    <a:pt x="5097938" y="219034"/>
-                  </a:lnTo>
-                  <a:lnTo>
-                    <a:pt x="5185834" y="222810"/>
-                  </a:lnTo>
-                  <a:lnTo>
-                    <a:pt x="5273729" y="226587"/>
-                  </a:lnTo>
-                  <a:lnTo>
-                    <a:pt x="5361625" y="230363"/>
-                  </a:lnTo>
-                  <a:lnTo>
-                    <a:pt x="5449520" y="234140"/>
-                  </a:lnTo>
-                  <a:lnTo>
-                    <a:pt x="5537416" y="237916"/>
-                  </a:lnTo>
-                  <a:lnTo>
-                    <a:pt x="5625311" y="241693"/>
-                  </a:lnTo>
-                  <a:lnTo>
-                    <a:pt x="5713207" y="245469"/>
-                  </a:lnTo>
-                  <a:lnTo>
-                    <a:pt x="5801102" y="249246"/>
-                  </a:lnTo>
-                  <a:lnTo>
-                    <a:pt x="5888998" y="253022"/>
-                  </a:lnTo>
-                  <a:lnTo>
-                    <a:pt x="5976893" y="256798"/>
-                  </a:lnTo>
-                  <a:lnTo>
-                    <a:pt x="6064789" y="260575"/>
-                  </a:lnTo>
-                  <a:lnTo>
-                    <a:pt x="6152684" y="264351"/>
-                  </a:lnTo>
-                  <a:lnTo>
-                    <a:pt x="6240580" y="268128"/>
-                  </a:lnTo>
-                  <a:lnTo>
-                    <a:pt x="6328475" y="271904"/>
-                  </a:lnTo>
-                  <a:lnTo>
-                    <a:pt x="6416371" y="275681"/>
-                  </a:lnTo>
-                  <a:lnTo>
-                    <a:pt x="6504266" y="279457"/>
-                  </a:lnTo>
-                  <a:lnTo>
-                    <a:pt x="6592162" y="283234"/>
-                  </a:lnTo>
-                  <a:lnTo>
-                    <a:pt x="6680057" y="287010"/>
-                  </a:lnTo>
-                  <a:lnTo>
-                    <a:pt x="6767953" y="290787"/>
-                  </a:lnTo>
-                  <a:lnTo>
-                    <a:pt x="6855848" y="294563"/>
-                  </a:lnTo>
-                  <a:lnTo>
-                    <a:pt x="6943744" y="298339"/>
+                    <a:pt x="87895" y="3440"/>
+                  </a:lnTo>
+                  <a:lnTo>
+                    <a:pt x="175790" y="6881"/>
+                  </a:lnTo>
+                  <a:lnTo>
+                    <a:pt x="263686" y="10322"/>
+                  </a:lnTo>
+                  <a:lnTo>
+                    <a:pt x="351581" y="13762"/>
+                  </a:lnTo>
+                  <a:lnTo>
+                    <a:pt x="439477" y="17203"/>
+                  </a:lnTo>
+                  <a:lnTo>
+                    <a:pt x="527372" y="20644"/>
+                  </a:lnTo>
+                  <a:lnTo>
+                    <a:pt x="615268" y="24084"/>
+                  </a:lnTo>
+                  <a:lnTo>
+                    <a:pt x="703163" y="27525"/>
+                  </a:lnTo>
+                  <a:lnTo>
+                    <a:pt x="791059" y="30966"/>
+                  </a:lnTo>
+                  <a:lnTo>
+                    <a:pt x="878954" y="34406"/>
+                  </a:lnTo>
+                  <a:lnTo>
+                    <a:pt x="966850" y="37847"/>
+                  </a:lnTo>
+                  <a:lnTo>
+                    <a:pt x="1054745" y="41288"/>
+                  </a:lnTo>
+                  <a:lnTo>
+                    <a:pt x="1142641" y="44729"/>
+                  </a:lnTo>
+                  <a:lnTo>
+                    <a:pt x="1230536" y="48169"/>
+                  </a:lnTo>
+                  <a:lnTo>
+                    <a:pt x="1318432" y="51610"/>
+                  </a:lnTo>
+                  <a:lnTo>
+                    <a:pt x="1406327" y="55051"/>
+                  </a:lnTo>
+                  <a:lnTo>
+                    <a:pt x="1494223" y="58491"/>
+                  </a:lnTo>
+                  <a:lnTo>
+                    <a:pt x="1582118" y="61932"/>
+                  </a:lnTo>
+                  <a:lnTo>
+                    <a:pt x="1670014" y="65373"/>
+                  </a:lnTo>
+                  <a:lnTo>
+                    <a:pt x="1757909" y="68813"/>
+                  </a:lnTo>
+                  <a:lnTo>
+                    <a:pt x="1845805" y="72254"/>
+                  </a:lnTo>
+                  <a:lnTo>
+                    <a:pt x="1933700" y="75695"/>
+                  </a:lnTo>
+                  <a:lnTo>
+                    <a:pt x="2021596" y="79136"/>
+                  </a:lnTo>
+                  <a:lnTo>
+                    <a:pt x="2109491" y="82576"/>
+                  </a:lnTo>
+                  <a:lnTo>
+                    <a:pt x="2197387" y="86017"/>
+                  </a:lnTo>
+                  <a:lnTo>
+                    <a:pt x="2285282" y="89458"/>
+                  </a:lnTo>
+                  <a:lnTo>
+                    <a:pt x="2373178" y="92898"/>
+                  </a:lnTo>
+                  <a:lnTo>
+                    <a:pt x="2461073" y="96339"/>
+                  </a:lnTo>
+                  <a:lnTo>
+                    <a:pt x="2548969" y="99780"/>
+                  </a:lnTo>
+                  <a:lnTo>
+                    <a:pt x="2636864" y="103220"/>
+                  </a:lnTo>
+                  <a:lnTo>
+                    <a:pt x="2724760" y="106661"/>
+                  </a:lnTo>
+                  <a:lnTo>
+                    <a:pt x="2812655" y="110102"/>
+                  </a:lnTo>
+                  <a:lnTo>
+                    <a:pt x="2900551" y="113542"/>
+                  </a:lnTo>
+                  <a:lnTo>
+                    <a:pt x="2988446" y="116983"/>
+                  </a:lnTo>
+                  <a:lnTo>
+                    <a:pt x="3076342" y="120424"/>
+                  </a:lnTo>
+                  <a:lnTo>
+                    <a:pt x="3164237" y="123865"/>
+                  </a:lnTo>
+                  <a:lnTo>
+                    <a:pt x="3252133" y="127305"/>
+                  </a:lnTo>
+                  <a:lnTo>
+                    <a:pt x="3340028" y="130746"/>
+                  </a:lnTo>
+                  <a:lnTo>
+                    <a:pt x="3427924" y="134187"/>
+                  </a:lnTo>
+                  <a:lnTo>
+                    <a:pt x="3515819" y="137627"/>
+                  </a:lnTo>
+                  <a:lnTo>
+                    <a:pt x="3603715" y="141068"/>
+                  </a:lnTo>
+                  <a:lnTo>
+                    <a:pt x="3691610" y="144509"/>
+                  </a:lnTo>
+                  <a:lnTo>
+                    <a:pt x="3779506" y="147949"/>
+                  </a:lnTo>
+                  <a:lnTo>
+                    <a:pt x="3867401" y="151390"/>
+                  </a:lnTo>
+                  <a:lnTo>
+                    <a:pt x="3955297" y="154831"/>
+                  </a:lnTo>
+                  <a:lnTo>
+                    <a:pt x="4043192" y="158272"/>
+                  </a:lnTo>
+                  <a:lnTo>
+                    <a:pt x="4131088" y="161712"/>
+                  </a:lnTo>
+                  <a:lnTo>
+                    <a:pt x="4218983" y="165153"/>
+                  </a:lnTo>
+                  <a:lnTo>
+                    <a:pt x="4306879" y="168594"/>
+                  </a:lnTo>
+                  <a:lnTo>
+                    <a:pt x="4394774" y="172034"/>
+                  </a:lnTo>
+                  <a:lnTo>
+                    <a:pt x="4482670" y="175475"/>
+                  </a:lnTo>
+                  <a:lnTo>
+                    <a:pt x="4570565" y="178916"/>
+                  </a:lnTo>
+                  <a:lnTo>
+                    <a:pt x="4658461" y="182356"/>
+                  </a:lnTo>
+                  <a:lnTo>
+                    <a:pt x="4746356" y="185797"/>
+                  </a:lnTo>
+                  <a:lnTo>
+                    <a:pt x="4834252" y="189238"/>
+                  </a:lnTo>
+                  <a:lnTo>
+                    <a:pt x="4922147" y="192678"/>
+                  </a:lnTo>
+                  <a:lnTo>
+                    <a:pt x="5010043" y="196119"/>
+                  </a:lnTo>
+                  <a:lnTo>
+                    <a:pt x="5097938" y="199560"/>
+                  </a:lnTo>
+                  <a:lnTo>
+                    <a:pt x="5185834" y="203001"/>
+                  </a:lnTo>
+                  <a:lnTo>
+                    <a:pt x="5273729" y="206441"/>
+                  </a:lnTo>
+                  <a:lnTo>
+                    <a:pt x="5361625" y="209882"/>
+                  </a:lnTo>
+                  <a:lnTo>
+                    <a:pt x="5449520" y="213323"/>
+                  </a:lnTo>
+                  <a:lnTo>
+                    <a:pt x="5537416" y="216763"/>
+                  </a:lnTo>
+                  <a:lnTo>
+                    <a:pt x="5625311" y="220204"/>
+                  </a:lnTo>
+                  <a:lnTo>
+                    <a:pt x="5713207" y="223645"/>
+                  </a:lnTo>
+                  <a:lnTo>
+                    <a:pt x="5801102" y="227085"/>
+                  </a:lnTo>
+                  <a:lnTo>
+                    <a:pt x="5888998" y="230526"/>
+                  </a:lnTo>
+                  <a:lnTo>
+                    <a:pt x="5976893" y="233967"/>
+                  </a:lnTo>
+                  <a:lnTo>
+                    <a:pt x="6064789" y="237408"/>
+                  </a:lnTo>
+                  <a:lnTo>
+                    <a:pt x="6152684" y="240848"/>
+                  </a:lnTo>
+                  <a:lnTo>
+                    <a:pt x="6240580" y="244289"/>
+                  </a:lnTo>
+                  <a:lnTo>
+                    <a:pt x="6328475" y="247730"/>
+                  </a:lnTo>
+                  <a:lnTo>
+                    <a:pt x="6416371" y="251170"/>
+                  </a:lnTo>
+                  <a:lnTo>
+                    <a:pt x="6504266" y="254611"/>
+                  </a:lnTo>
+                  <a:lnTo>
+                    <a:pt x="6592162" y="258052"/>
+                  </a:lnTo>
+                  <a:lnTo>
+                    <a:pt x="6680057" y="261492"/>
+                  </a:lnTo>
+                  <a:lnTo>
+                    <a:pt x="6767953" y="264933"/>
+                  </a:lnTo>
+                  <a:lnTo>
+                    <a:pt x="6855848" y="268374"/>
+                  </a:lnTo>
+                  <a:lnTo>
+                    <a:pt x="6943744" y="271814"/>
                   </a:lnTo>
                 </a:path>
               </a:pathLst>
@@ -9445,7 +9410,7 @@
         </p:sp>
         <p:sp>
           <p:nvSpPr>
-            <p:cNvPr id="171" name="tx171"/>
+            <p:cNvPr id="170" name="tx170"/>
             <p:cNvSpPr/>
             <p:nvPr/>
           </p:nvSpPr>
@@ -9491,7 +9456,7 @@
         </p:sp>
         <p:sp>
           <p:nvSpPr>
-            <p:cNvPr id="172" name="tx172"/>
+            <p:cNvPr id="171" name="tx171"/>
             <p:cNvSpPr/>
             <p:nvPr/>
           </p:nvSpPr>
@@ -9537,7 +9502,7 @@
         </p:sp>
         <p:sp>
           <p:nvSpPr>
-            <p:cNvPr id="173" name="tx173"/>
+            <p:cNvPr id="172" name="tx172"/>
             <p:cNvSpPr/>
             <p:nvPr/>
           </p:nvSpPr>
@@ -9583,7 +9548,7 @@
         </p:sp>
         <p:sp>
           <p:nvSpPr>
-            <p:cNvPr id="174" name="tx174"/>
+            <p:cNvPr id="173" name="tx173"/>
             <p:cNvSpPr/>
             <p:nvPr/>
           </p:nvSpPr>
@@ -9629,7 +9594,7 @@
         </p:sp>
         <p:sp>
           <p:nvSpPr>
-            <p:cNvPr id="175" name="tx175"/>
+            <p:cNvPr id="174" name="tx174"/>
             <p:cNvSpPr/>
             <p:nvPr/>
           </p:nvSpPr>
@@ -9675,7 +9640,7 @@
         </p:sp>
         <p:sp>
           <p:nvSpPr>
-            <p:cNvPr id="176" name="tx176"/>
+            <p:cNvPr id="175" name="tx175"/>
             <p:cNvSpPr/>
             <p:nvPr/>
           </p:nvSpPr>
@@ -9721,7 +9686,7 @@
         </p:sp>
         <p:sp>
           <p:nvSpPr>
-            <p:cNvPr id="177" name="tx177"/>
+            <p:cNvPr id="176" name="tx176"/>
             <p:cNvSpPr/>
             <p:nvPr/>
           </p:nvSpPr>
@@ -9767,7 +9732,7 @@
         </p:sp>
         <p:sp>
           <p:nvSpPr>
-            <p:cNvPr id="178" name="tx178"/>
+            <p:cNvPr id="177" name="tx177"/>
             <p:cNvSpPr/>
             <p:nvPr/>
           </p:nvSpPr>
@@ -9813,7 +9778,7 @@
         </p:sp>
         <p:sp>
           <p:nvSpPr>
-            <p:cNvPr id="179" name="tx179"/>
+            <p:cNvPr id="178" name="tx178"/>
             <p:cNvSpPr/>
             <p:nvPr/>
           </p:nvSpPr>
@@ -9859,7 +9824,7 @@
         </p:sp>
         <p:sp>
           <p:nvSpPr>
-            <p:cNvPr id="180" name="tx180"/>
+            <p:cNvPr id="179" name="tx179"/>
             <p:cNvSpPr/>
             <p:nvPr/>
           </p:nvSpPr>
@@ -9905,7 +9870,7 @@
         </p:sp>
         <p:sp>
           <p:nvSpPr>
-            <p:cNvPr id="181" name="tx181"/>
+            <p:cNvPr id="180" name="tx180"/>
             <p:cNvSpPr/>
             <p:nvPr/>
           </p:nvSpPr>
@@ -9951,7 +9916,7 @@
         </p:sp>
         <p:sp>
           <p:nvSpPr>
-            <p:cNvPr id="182" name="tx182"/>
+            <p:cNvPr id="181" name="tx181"/>
             <p:cNvSpPr/>
             <p:nvPr/>
           </p:nvSpPr>
@@ -9997,7 +9962,7 @@
         </p:sp>
         <p:sp>
           <p:nvSpPr>
-            <p:cNvPr id="183" name="tx183"/>
+            <p:cNvPr id="182" name="tx182"/>
             <p:cNvSpPr/>
             <p:nvPr/>
           </p:nvSpPr>
